--- a/lecons/F5/09_F5_M1_L08_Development_of_Road_Transport.pptx
+++ b/lecons/F5/09_F5_M1_L08_Development_of_Road_Transport.pptx
@@ -13421,7 +13421,7 @@
               <a:buNone/>
             </a:pPr>
             <a:r>
-              <a:rPr lang="en-US" sz="4000" b="1" dirty="0">
+              <a:rPr lang="en-US" sz="3200" b="1" dirty="0">
                 <a:solidFill>
                   <a:srgbClr val="111111"/>
                 </a:solidFill>
@@ -13431,7 +13431,7 @@
               </a:rPr>
               <a:t>Topic: Managing Resources for Development through Economic Activities</a:t>
             </a:r>
-            <a:endParaRPr lang="en-US" sz="4000" dirty="0"/>
+            <a:endParaRPr lang="en-US" sz="3200" dirty="0"/>
           </a:p>
           <a:p>
             <a:pPr algn="l" indent="0" marL="0">
@@ -13441,7 +13441,7 @@
               <a:buNone/>
             </a:pPr>
             <a:r>
-              <a:rPr lang="en-US" sz="4000" b="1" dirty="0">
+              <a:rPr lang="en-US" sz="3200" b="1" dirty="0">
                 <a:solidFill>
                   <a:srgbClr val="111111"/>
                 </a:solidFill>
@@ -13451,7 +13451,7 @@
               </a:rPr>
               <a:t>Sub-topic: World Communication</a:t>
             </a:r>
-            <a:endParaRPr lang="en-US" sz="4000" dirty="0"/>
+            <a:endParaRPr lang="en-US" sz="3200" dirty="0"/>
           </a:p>
           <a:p>
             <a:pPr algn="l" indent="0" marL="0">
@@ -13461,7 +13461,7 @@
               <a:buNone/>
             </a:pPr>
             <a:r>
-              <a:rPr lang="en-US" sz="4000" b="1" dirty="0">
+              <a:rPr lang="en-US" sz="3200" b="1" dirty="0">
                 <a:solidFill>
                   <a:srgbClr val="990011"/>
                 </a:solidFill>
@@ -13471,7 +13471,7 @@
               </a:rPr>
               <a:t>Lesson 8: Development of Road Transport</a:t>
             </a:r>
-            <a:endParaRPr lang="en-US" sz="4000" dirty="0"/>
+            <a:endParaRPr lang="en-US" sz="3200" dirty="0"/>
           </a:p>
         </p:txBody>
       </p:sp>

--- a/lecons/F5/09_F5_M1_L08_Development_of_Road_Transport.pptx
+++ b/lecons/F5/09_F5_M1_L08_Development_of_Road_Transport.pptx
@@ -58,9 +58,11 @@
     <p:sldId id="306" r:id="rId52"/>
     <p:sldId id="307" r:id="rId53"/>
     <p:sldId id="308" r:id="rId54"/>
+    <p:sldId id="309" r:id="rId55"/>
+    <p:sldId id="310" r:id="rId56"/>
   </p:sldIdLst>
   <p:notesMasterIdLst>
-    <p:notesMasterId r:id="rId55"/>
+    <p:notesMasterId r:id="rId57"/>
   </p:notesMasterIdLst>
   <p:sldSz cx="12192000" cy="6858000"/>
   <p:notesSz cx="6858000" cy="12192000"/>
@@ -3370,7 +3372,7 @@
           <a:p>
             <a:r>
               <a:rPr lang="en-US" dirty="0"/>
-              <a:t>Let us copy Advantages and Disadvantages. Road transport has the following advantages and disadvantages. On this slide we have Advantages and Disadvantages. Write each point on a new line, with the key term first, and explain it in your own words when we revise. When you finish, we go to the next slide.</a:t>
+              <a:t>Let us copy Advantages. Road transport has the following advantages. On this slide we have Flexibility and Access to remote places. Write each point on a new line, with the key term first, and explain it in your own words when we revise. When you finish, we go to the next slide.</a:t>
             </a:r>
             <a:endParaRPr lang="en-US" dirty="0"/>
           </a:p>
@@ -3546,7 +3548,7 @@
           <a:p>
             <a:r>
               <a:rPr lang="en-US" dirty="0"/>
-              <a:t>We continue with Advantages and Disadvantages. On this slide we have Limits. Write each point on a new line, with the key term first, and explain it in your own words when we revise.</a:t>
+              <a:t>We continue with Advantages. On this slide we have Door-to-door service. Write each point on a new line, with the key term first, and explain it in your own words when we revise.</a:t>
             </a:r>
             <a:endParaRPr lang="en-US" dirty="0"/>
           </a:p>
@@ -3634,7 +3636,7 @@
           <a:p>
             <a:r>
               <a:rPr lang="en-US" dirty="0"/>
-              <a:t>Now draw this illustration in your notebook: transport costs and distance. Give it a title and label it clearly.</a:t>
+              <a:t>Let us copy Disadvantages. Road transport has the following disadvantages. On this slide we have Accidents, Traffic jams and Air pollution. Write each point on a new line, with the key term first, and explain it in your own words when we revise. When you finish, we go to the next slide.</a:t>
             </a:r>
             <a:endParaRPr lang="en-US" dirty="0"/>
           </a:p>
@@ -3722,7 +3724,7 @@
           <a:p>
             <a:r>
               <a:rPr lang="en-US" dirty="0"/>
-              <a:t>Now let us check what you have understood. Question 1: Give two conditions for road development. Answer in your exercise book.</a:t>
+              <a:t>We continue with Disadvantages. On this slide we have Small loads. Write each point on a new line, with the key term first, and explain it in your own words when we revise.</a:t>
             </a:r>
             <a:endParaRPr lang="en-US" dirty="0"/>
           </a:p>
@@ -3810,7 +3812,7 @@
           <a:p>
             <a:r>
               <a:rPr lang="en-US" dirty="0"/>
-              <a:t>The expected answer is: flat relief and capital. If you got it right, well done.</a:t>
+              <a:t>Now draw this illustration in your notebook: transport costs and distance. Give it a title and label it clearly.</a:t>
             </a:r>
             <a:endParaRPr lang="en-US" dirty="0"/>
           </a:p>
@@ -3898,7 +3900,7 @@
           <a:p>
             <a:r>
               <a:rPr lang="en-US" dirty="0"/>
-              <a:t>Now let us check what you have understood. Question 2: Give one advantage and one disadvantage of road transport. Answer in your exercise book.</a:t>
+              <a:t>Now let us check what you have understood. Question 1: Give two conditions for road development. Answer in your exercise book.</a:t>
             </a:r>
             <a:endParaRPr lang="en-US" dirty="0"/>
           </a:p>
@@ -3986,7 +3988,7 @@
           <a:p>
             <a:r>
               <a:rPr lang="en-US" dirty="0"/>
-              <a:t>The expected answer is: door-to-door service; accidents. If you got it right, well done.</a:t>
+              <a:t>The expected answer is: flat relief and capital. If you got it right, well done.</a:t>
             </a:r>
             <a:endParaRPr lang="en-US" dirty="0"/>
           </a:p>
@@ -4074,7 +4076,7 @@
           <a:p>
             <a:r>
               <a:rPr lang="en-US" dirty="0"/>
-              <a:t>For those who need more practice, fill in the blanks in your exercise book. The answers are: number 1, tarred; number 2, door-to-door; number 3, pollution.</a:t>
+              <a:t>Now let us check what you have understood. Question 2: Give one advantage and one disadvantage of road transport. Answer in your exercise book.</a:t>
             </a:r>
             <a:endParaRPr lang="en-US" dirty="0"/>
           </a:p>
@@ -4162,7 +4164,7 @@
           <a:p>
             <a:r>
               <a:rPr lang="en-US" dirty="0"/>
-              <a:t>For your homework: Describe the state of the road leading to your village and propose two improvements. We shall correct it at the beginning of our next lesson.</a:t>
+              <a:t>The expected answer is: door-to-door service; accidents. If you got it right, well done.</a:t>
             </a:r>
             <a:endParaRPr lang="en-US" dirty="0"/>
           </a:p>
@@ -4250,7 +4252,7 @@
           <a:p>
             <a:r>
               <a:rPr lang="en-US" dirty="0"/>
-              <a:t>Our next lesson will be on Lesson 9: Development of Rail Transport. Thank you for your attention, and see you next time.</a:t>
+              <a:t>For those who need more practice, fill in the blanks in your exercise book. The answers are: number 1, tarred; number 2, door-to-door; number 3, pollution.</a:t>
             </a:r>
             <a:endParaRPr lang="en-US" dirty="0"/>
           </a:p>
@@ -4338,7 +4340,7 @@
           <a:p>
             <a:r>
               <a:rPr lang="en-US" dirty="0"/>
-              <a:t>Let us play the bilingual game. I say a word in English, and you give me the French word. Then we do the reverse.</a:t>
+              <a:t>For your homework: Describe the state of the road leading to your village and propose two improvements. We shall correct it at the beginning of our next lesson.</a:t>
             </a:r>
             <a:endParaRPr lang="en-US" dirty="0"/>
           </a:p>
@@ -4514,7 +4516,7 @@
           <a:p>
             <a:r>
               <a:rPr lang="en-US" dirty="0"/>
-              <a:t>I record this information in the official logbook of the class after the lesson.</a:t>
+              <a:t>Our next lesson will be on Lesson 9: Development of Rail Transport. Thank you for your attention, and see you next time.</a:t>
             </a:r>
             <a:endParaRPr lang="en-US" dirty="0"/>
           </a:p>
@@ -4602,7 +4604,7 @@
           <a:p>
             <a:r>
               <a:rPr lang="en-US" dirty="0"/>
-              <a:t>I complete the second page of the logbook: the matter taught, the evaluation, the homework and the attendance.</a:t>
+              <a:t>Let us play the bilingual game. I say a word in English, and you give me the French word. Then we do the reverse.</a:t>
             </a:r>
             <a:endParaRPr lang="en-US" dirty="0"/>
           </a:p>
@@ -4690,7 +4692,7 @@
           <a:p>
             <a:r>
               <a:rPr lang="en-US" dirty="0"/>
-              <a:t>This slide is for me, the teacher: it gives the timing of the lesson and what to do if the projector is not available.</a:t>
+              <a:t>I record this information in the official logbook of the class after the lesson.</a:t>
             </a:r>
             <a:endParaRPr lang="en-US" dirty="0"/>
           </a:p>
@@ -4778,7 +4780,7 @@
           <a:p>
             <a:r>
               <a:rPr lang="en-US" dirty="0"/>
-              <a:t>These are the references and picture credits used to prepare this lesson.</a:t>
+              <a:t>I complete the second page of the logbook: the matter taught, the evaluation, the homework and the attendance.</a:t>
             </a:r>
             <a:endParaRPr lang="en-US" dirty="0"/>
           </a:p>
@@ -4802,6 +4804,182 @@
             <a:fld id="{F7021451-1387-4CA6-816F-3879F97B5CBC}" type="slidenum">
               <a:rPr lang="en-US"/>
               <a:t>53</a:t>
+            </a:fld>
+            <a:endParaRPr lang="en-US"/>
+          </a:p>
+        </p:txBody>
+      </p:sp>
+    </p:spTree>
+    <p:extLst>
+      <p:ext uri="{BB962C8B-B14F-4D97-AF65-F5344CB8AC3E}">
+        <p14:creationId xmlns:p14="http://schemas.microsoft.com/office/powerpoint/2010/main" val="1024086991"/>
+      </p:ext>
+    </p:extLst>
+  </p:cSld>
+  <p:clrMapOvr>
+    <a:masterClrMapping/>
+  </p:clrMapOvr>
+</p:notes>
+</file>
+
+<file path=ppt/notesSlides/notesSlide54.xml><?xml version="1.0" encoding="utf-8"?>
+<p:notes xmlns:a="http://schemas.openxmlformats.org/drawingml/2006/main" xmlns:r="http://schemas.openxmlformats.org/officeDocument/2006/relationships" xmlns:p="http://schemas.openxmlformats.org/presentationml/2006/main">
+  <p:cSld>
+    <p:spTree>
+      <p:nvGrpSpPr>
+        <p:cNvPr id="1" name=""/>
+        <p:cNvGrpSpPr/>
+        <p:nvPr/>
+      </p:nvGrpSpPr>
+      <p:grpSpPr>
+        <a:xfrm>
+          <a:off x="0" y="0"/>
+          <a:ext cx="0" cy="0"/>
+          <a:chOff x="0" y="0"/>
+          <a:chExt cx="0" cy="0"/>
+        </a:xfrm>
+      </p:grpSpPr>
+      <p:sp>
+        <p:nvSpPr>
+          <p:cNvPr id="2" name="Slide Image Placeholder 1"/>
+          <p:cNvSpPr>
+            <a:spLocks noGrp="1" noRot="1" noChangeAspect="1"/>
+          </p:cNvSpPr>
+          <p:nvPr>
+            <p:ph type="sldImg"/>
+          </p:nvPr>
+        </p:nvSpPr>
+        <p:spPr/>
+      </p:sp>
+      <p:sp>
+        <p:nvSpPr>
+          <p:cNvPr id="3" name="Notes Placeholder 2"/>
+          <p:cNvSpPr>
+            <a:spLocks noGrp="1"/>
+          </p:cNvSpPr>
+          <p:nvPr>
+            <p:ph type="body" idx="1"/>
+          </p:nvPr>
+        </p:nvSpPr>
+        <p:spPr/>
+        <p:txBody>
+          <a:bodyPr/>
+          <a:lstStyle/>
+          <a:p>
+            <a:r>
+              <a:rPr lang="en-US" dirty="0"/>
+              <a:t>This slide is for me, the teacher: it gives the timing of the lesson and what to do if the projector is not available.</a:t>
+            </a:r>
+            <a:endParaRPr lang="en-US" dirty="0"/>
+          </a:p>
+        </p:txBody>
+      </p:sp>
+      <p:sp>
+        <p:nvSpPr>
+          <p:cNvPr id="4" name="Slide Number Placeholder 3"/>
+          <p:cNvSpPr>
+            <a:spLocks noGrp="1"/>
+          </p:cNvSpPr>
+          <p:nvPr>
+            <p:ph type="sldNum" sz="quarter" idx="10"/>
+          </p:nvPr>
+        </p:nvSpPr>
+        <p:spPr/>
+        <p:txBody>
+          <a:bodyPr/>
+          <a:lstStyle/>
+          <a:p>
+            <a:fld id="{F7021451-1387-4CA6-816F-3879F97B5CBC}" type="slidenum">
+              <a:rPr lang="en-US"/>
+              <a:t>54</a:t>
+            </a:fld>
+            <a:endParaRPr lang="en-US"/>
+          </a:p>
+        </p:txBody>
+      </p:sp>
+    </p:spTree>
+    <p:extLst>
+      <p:ext uri="{BB962C8B-B14F-4D97-AF65-F5344CB8AC3E}">
+        <p14:creationId xmlns:p14="http://schemas.microsoft.com/office/powerpoint/2010/main" val="1024086991"/>
+      </p:ext>
+    </p:extLst>
+  </p:cSld>
+  <p:clrMapOvr>
+    <a:masterClrMapping/>
+  </p:clrMapOvr>
+</p:notes>
+</file>
+
+<file path=ppt/notesSlides/notesSlide55.xml><?xml version="1.0" encoding="utf-8"?>
+<p:notes xmlns:a="http://schemas.openxmlformats.org/drawingml/2006/main" xmlns:r="http://schemas.openxmlformats.org/officeDocument/2006/relationships" xmlns:p="http://schemas.openxmlformats.org/presentationml/2006/main">
+  <p:cSld>
+    <p:spTree>
+      <p:nvGrpSpPr>
+        <p:cNvPr id="1" name=""/>
+        <p:cNvGrpSpPr/>
+        <p:nvPr/>
+      </p:nvGrpSpPr>
+      <p:grpSpPr>
+        <a:xfrm>
+          <a:off x="0" y="0"/>
+          <a:ext cx="0" cy="0"/>
+          <a:chOff x="0" y="0"/>
+          <a:chExt cx="0" cy="0"/>
+        </a:xfrm>
+      </p:grpSpPr>
+      <p:sp>
+        <p:nvSpPr>
+          <p:cNvPr id="2" name="Slide Image Placeholder 1"/>
+          <p:cNvSpPr>
+            <a:spLocks noGrp="1" noRot="1" noChangeAspect="1"/>
+          </p:cNvSpPr>
+          <p:nvPr>
+            <p:ph type="sldImg"/>
+          </p:nvPr>
+        </p:nvSpPr>
+        <p:spPr/>
+      </p:sp>
+      <p:sp>
+        <p:nvSpPr>
+          <p:cNvPr id="3" name="Notes Placeholder 2"/>
+          <p:cNvSpPr>
+            <a:spLocks noGrp="1"/>
+          </p:cNvSpPr>
+          <p:nvPr>
+            <p:ph type="body" idx="1"/>
+          </p:nvPr>
+        </p:nvSpPr>
+        <p:spPr/>
+        <p:txBody>
+          <a:bodyPr/>
+          <a:lstStyle/>
+          <a:p>
+            <a:r>
+              <a:rPr lang="en-US" dirty="0"/>
+              <a:t>These are the references and picture credits used to prepare this lesson.</a:t>
+            </a:r>
+            <a:endParaRPr lang="en-US" dirty="0"/>
+          </a:p>
+        </p:txBody>
+      </p:sp>
+      <p:sp>
+        <p:nvSpPr>
+          <p:cNvPr id="4" name="Slide Number Placeholder 3"/>
+          <p:cNvSpPr>
+            <a:spLocks noGrp="1"/>
+          </p:cNvSpPr>
+          <p:nvPr>
+            <p:ph type="sldNum" sz="quarter" idx="10"/>
+          </p:nvPr>
+        </p:nvSpPr>
+        <p:spPr/>
+        <p:txBody>
+          <a:bodyPr/>
+          <a:lstStyle/>
+          <a:p>
+            <a:fld id="{F7021451-1387-4CA6-816F-3879F97B5CBC}" type="slidenum">
+              <a:rPr lang="en-US"/>
+              <a:t>55</a:t>
             </a:fld>
             <a:endParaRPr lang="en-US"/>
           </a:p>
@@ -14662,7 +14840,7 @@
         <p:spPr>
           <a:xfrm>
             <a:off x="0" y="658368"/>
-            <a:ext cx="2468880" cy="5833872"/>
+            <a:ext cx="3840480" cy="5833872"/>
           </a:xfrm>
           <a:prstGeom prst="rect">
             <a:avLst/>
@@ -14677,8 +14855,8 @@
         </p:nvSpPr>
         <p:spPr>
           <a:xfrm>
-            <a:off x="2697480" y="1005840"/>
-            <a:ext cx="9174175" cy="731520"/>
+            <a:off x="4069080" y="1005840"/>
+            <a:ext cx="7802575" cy="731520"/>
           </a:xfrm>
           <a:prstGeom prst="rect">
             <a:avLst/>
@@ -14718,8 +14896,47 @@
         </p:nvSpPr>
         <p:spPr>
           <a:xfrm>
-            <a:off x="2697480" y="1783080"/>
-            <a:ext cx="9174175" cy="4663440"/>
+            <a:off x="4069080" y="1737360"/>
+            <a:ext cx="7802575" cy="457200"/>
+          </a:xfrm>
+          <a:prstGeom prst="rect">
+            <a:avLst/>
+          </a:prstGeom>
+          <a:noFill/>
+          <a:ln/>
+        </p:spPr>
+        <p:txBody>
+          <a:bodyPr wrap="square" lIns="0" tIns="0" rIns="0" bIns="0" rtlCol="0" anchor="ctr"/>
+          <a:lstStyle/>
+          <a:p>
+            <a:pPr algn="l" indent="0" marL="0">
+              <a:buNone/>
+            </a:pPr>
+            <a:r>
+              <a:rPr lang="en-US" sz="3200" b="1" dirty="0">
+                <a:solidFill>
+                  <a:srgbClr val="990011"/>
+                </a:solidFill>
+                <a:latin typeface="Times New Roman" pitchFamily="34" charset="0"/>
+                <a:ea typeface="Times New Roman" pitchFamily="34" charset="-122"/>
+                <a:cs typeface="Times New Roman" pitchFamily="34" charset="-120"/>
+              </a:rPr>
+              <a:t>A) Advantages</a:t>
+            </a:r>
+            <a:endParaRPr lang="en-US" sz="3200" dirty="0"/>
+          </a:p>
+        </p:txBody>
+      </p:sp>
+      <p:sp>
+        <p:nvSpPr>
+          <p:cNvPr id="6" name="Text 3"/>
+          <p:cNvSpPr/>
+          <p:nvPr/>
+        </p:nvSpPr>
+        <p:spPr>
+          <a:xfrm>
+            <a:off x="4069080" y="2240280"/>
+            <a:ext cx="7802575" cy="4206240"/>
           </a:xfrm>
           <a:prstGeom prst="rect">
             <a:avLst/>
@@ -14746,7 +14963,7 @@
                 <a:ea typeface="Times New Roman" pitchFamily="34" charset="-122"/>
                 <a:cs typeface="Times New Roman" pitchFamily="34" charset="-120"/>
               </a:rPr>
-              <a:t>Road transport has the following advantages and disadvantages:</a:t>
+              <a:t>Road transport has the following advantages:</a:t>
             </a:r>
             <a:endParaRPr lang="en-US" sz="4000" dirty="0"/>
           </a:p>
@@ -14766,7 +14983,7 @@
                 <a:ea typeface="Times New Roman" pitchFamily="34" charset="-122"/>
                 <a:cs typeface="Times New Roman" pitchFamily="34" charset="-120"/>
               </a:rPr>
-              <a:t>Advantages: </a:t>
+              <a:t>Flexibility: </a:t>
             </a:r>
             <a:pPr algn="l" indent="0" marL="0">
               <a:spcAft>
@@ -14783,7 +15000,7 @@
                 <a:ea typeface="Times New Roman" pitchFamily="34" charset="-122"/>
                 <a:cs typeface="Times New Roman" pitchFamily="34" charset="-120"/>
               </a:rPr>
-              <a:t>It is flexible, reaches remote places and gives door-to-door service.</a:t>
+              <a:t>Vehicles can go anywhere at any time.</a:t>
             </a:r>
             <a:endParaRPr lang="en-US" sz="4000" dirty="0"/>
           </a:p>
@@ -14803,7 +15020,7 @@
                 <a:ea typeface="Times New Roman" pitchFamily="34" charset="-122"/>
                 <a:cs typeface="Times New Roman" pitchFamily="34" charset="-120"/>
               </a:rPr>
-              <a:t>Disadvantages: </a:t>
+              <a:t>Access to remote places: </a:t>
             </a:r>
             <a:pPr algn="l" indent="0" marL="0">
               <a:spcAft>
@@ -14820,7 +15037,7 @@
                 <a:ea typeface="Times New Roman" pitchFamily="34" charset="-122"/>
                 <a:cs typeface="Times New Roman" pitchFamily="34" charset="-120"/>
               </a:rPr>
-              <a:t>It causes accidents, traffic jams and air pollution.</a:t>
+              <a:t>Roads reach villages far from railways.</a:t>
             </a:r>
             <a:endParaRPr lang="en-US" sz="4000" dirty="0"/>
           </a:p>
@@ -15236,7 +15453,7 @@
                 <a:ea typeface="Times New Roman" pitchFamily="34" charset="-122"/>
                 <a:cs typeface="Times New Roman" pitchFamily="34" charset="-120"/>
               </a:rPr>
-              <a:t>3. Advantages and Disadvantages (continued)</a:t>
+              <a:t>3. Advantages and Disadvantages</a:t>
             </a:r>
             <a:endParaRPr lang="en-US" sz="3600" dirty="0"/>
           </a:p>
@@ -15250,8 +15467,47 @@
         </p:nvSpPr>
         <p:spPr>
           <a:xfrm>
-            <a:off x="5349240" y="1783080"/>
-            <a:ext cx="6522415" cy="4663440"/>
+            <a:off x="5349240" y="1737360"/>
+            <a:ext cx="6522415" cy="457200"/>
+          </a:xfrm>
+          <a:prstGeom prst="rect">
+            <a:avLst/>
+          </a:prstGeom>
+          <a:noFill/>
+          <a:ln/>
+        </p:spPr>
+        <p:txBody>
+          <a:bodyPr wrap="square" lIns="0" tIns="0" rIns="0" bIns="0" rtlCol="0" anchor="ctr"/>
+          <a:lstStyle/>
+          <a:p>
+            <a:pPr algn="l" indent="0" marL="0">
+              <a:buNone/>
+            </a:pPr>
+            <a:r>
+              <a:rPr lang="en-US" sz="3200" b="1" dirty="0">
+                <a:solidFill>
+                  <a:srgbClr val="990011"/>
+                </a:solidFill>
+                <a:latin typeface="Times New Roman" pitchFamily="34" charset="0"/>
+                <a:ea typeface="Times New Roman" pitchFamily="34" charset="-122"/>
+                <a:cs typeface="Times New Roman" pitchFamily="34" charset="-120"/>
+              </a:rPr>
+              <a:t>A) Advantages (continued)</a:t>
+            </a:r>
+            <a:endParaRPr lang="en-US" sz="3200" dirty="0"/>
+          </a:p>
+        </p:txBody>
+      </p:sp>
+      <p:sp>
+        <p:nvSpPr>
+          <p:cNvPr id="6" name="Text 3"/>
+          <p:cNvSpPr/>
+          <p:nvPr/>
+        </p:nvSpPr>
+        <p:spPr>
+          <a:xfrm>
+            <a:off x="5349240" y="2240280"/>
+            <a:ext cx="6522415" cy="4206240"/>
           </a:xfrm>
           <a:prstGeom prst="rect">
             <a:avLst/>
@@ -15278,7 +15534,7 @@
                 <a:ea typeface="Times New Roman" pitchFamily="34" charset="-122"/>
                 <a:cs typeface="Times New Roman" pitchFamily="34" charset="-120"/>
               </a:rPr>
-              <a:t>Limits: </a:t>
+              <a:t>Door-to-door service: </a:t>
             </a:r>
             <a:pPr algn="l" indent="0" marL="0">
               <a:spcAft>
@@ -15295,7 +15551,7 @@
                 <a:ea typeface="Times New Roman" pitchFamily="34" charset="-122"/>
                 <a:cs typeface="Times New Roman" pitchFamily="34" charset="-120"/>
               </a:rPr>
-              <a:t>It carries small loads and is costly over long distances.</a:t>
+              <a:t>Goods are delivered to the customer.</a:t>
             </a:r>
             <a:endParaRPr lang="en-US" sz="4000" dirty="0"/>
           </a:p>
@@ -15413,48 +15669,9 @@
           </a:p>
         </p:txBody>
       </p:sp>
-      <p:sp>
-        <p:nvSpPr>
-          <p:cNvPr id="3" name="Text 1"/>
-          <p:cNvSpPr/>
-          <p:nvPr/>
-        </p:nvSpPr>
-        <p:spPr>
-          <a:xfrm>
-            <a:off x="457200" y="1005840"/>
-            <a:ext cx="11277295" cy="731520"/>
-          </a:xfrm>
-          <a:prstGeom prst="rect">
-            <a:avLst/>
-          </a:prstGeom>
-          <a:noFill/>
-          <a:ln/>
-        </p:spPr>
-        <p:txBody>
-          <a:bodyPr wrap="square" lIns="0" tIns="0" rIns="0" bIns="0" rtlCol="0" anchor="ctr"/>
-          <a:lstStyle/>
-          <a:p>
-            <a:pPr algn="ctr" indent="0" marL="0">
-              <a:buNone/>
-            </a:pPr>
-            <a:r>
-              <a:rPr lang="en-US" sz="3600" b="1" dirty="0">
-                <a:solidFill>
-                  <a:srgbClr val="990011"/>
-                </a:solidFill>
-                <a:latin typeface="Times New Roman" pitchFamily="34" charset="0"/>
-                <a:ea typeface="Times New Roman" pitchFamily="34" charset="-122"/>
-                <a:cs typeface="Times New Roman" pitchFamily="34" charset="-120"/>
-              </a:rPr>
-              <a:t>3. Advantages and Disadvantages</a:t>
-            </a:r>
-            <a:endParaRPr lang="en-US" sz="3600" dirty="0"/>
-          </a:p>
-        </p:txBody>
-      </p:sp>
       <p:pic>
         <p:nvPicPr>
-          <p:cNvPr id="4" name="Image 0" descr="/home/claude/f4/img/v2/transport_costs_big.png">    </p:cNvPr>
+          <p:cNvPr id="3" name="Image 0" descr="/home/claude/f4/img/minesec_sheet.png">    </p:cNvPr>
           <p:cNvPicPr>
             <a:picLocks noChangeAspect="1"/>
           </p:cNvPicPr>
@@ -15468,8 +15685,8 @@
         </p:blipFill>
         <p:spPr>
           <a:xfrm>
-            <a:off x="1215564" y="1783080"/>
-            <a:ext cx="9760567" cy="4270248"/>
+            <a:off x="0" y="658368"/>
+            <a:ext cx="2468880" cy="5833872"/>
           </a:xfrm>
           <a:prstGeom prst="rect">
             <a:avLst/>
@@ -15478,14 +15695,14 @@
       </p:pic>
       <p:sp>
         <p:nvSpPr>
-          <p:cNvPr id="5" name="Text 2"/>
+          <p:cNvPr id="4" name="Text 1"/>
           <p:cNvSpPr/>
           <p:nvPr/>
         </p:nvSpPr>
         <p:spPr>
           <a:xfrm>
-            <a:off x="457200" y="6089904"/>
-            <a:ext cx="11277295" cy="347472"/>
+            <a:off x="2697480" y="1005840"/>
+            <a:ext cx="9174175" cy="731520"/>
           </a:xfrm>
           <a:prstGeom prst="rect">
             <a:avLst/>
@@ -15494,24 +15711,218 @@
           <a:ln/>
         </p:spPr>
         <p:txBody>
-          <a:bodyPr wrap="square" lIns="0" tIns="0" rIns="0" bIns="0" rtlCol="0" anchor="ctr"/>
+          <a:bodyPr wrap="square" lIns="0" tIns="0" rIns="0" bIns="0" rtlCol="0" anchor="ctr">
+            <a:normAutofit/>
+          </a:bodyPr>
           <a:lstStyle/>
           <a:p>
             <a:pPr algn="ctr" indent="0" marL="0">
               <a:buNone/>
             </a:pPr>
             <a:r>
-              <a:rPr lang="en-US" sz="1800" i="1" dirty="0">
-                <a:solidFill>
-                  <a:srgbClr val="555555"/>
+              <a:rPr lang="en-US" sz="3600" b="1" dirty="0">
+                <a:solidFill>
+                  <a:srgbClr val="990011"/>
                 </a:solidFill>
                 <a:latin typeface="Times New Roman" pitchFamily="34" charset="0"/>
                 <a:ea typeface="Times New Roman" pitchFamily="34" charset="-122"/>
                 <a:cs typeface="Times New Roman" pitchFamily="34" charset="-120"/>
               </a:rPr>
-              <a:t>Illustration: transport costs and distance</a:t>
-            </a:r>
-            <a:endParaRPr lang="en-US" sz="1800" dirty="0"/>
+              <a:t>3. Advantages and Disadvantages</a:t>
+            </a:r>
+            <a:endParaRPr lang="en-US" sz="3600" dirty="0"/>
+          </a:p>
+        </p:txBody>
+      </p:sp>
+      <p:sp>
+        <p:nvSpPr>
+          <p:cNvPr id="5" name="Text 2"/>
+          <p:cNvSpPr/>
+          <p:nvPr/>
+        </p:nvSpPr>
+        <p:spPr>
+          <a:xfrm>
+            <a:off x="2697480" y="1737360"/>
+            <a:ext cx="9174175" cy="457200"/>
+          </a:xfrm>
+          <a:prstGeom prst="rect">
+            <a:avLst/>
+          </a:prstGeom>
+          <a:noFill/>
+          <a:ln/>
+        </p:spPr>
+        <p:txBody>
+          <a:bodyPr wrap="square" lIns="0" tIns="0" rIns="0" bIns="0" rtlCol="0" anchor="ctr"/>
+          <a:lstStyle/>
+          <a:p>
+            <a:pPr algn="l" indent="0" marL="0">
+              <a:buNone/>
+            </a:pPr>
+            <a:r>
+              <a:rPr lang="en-US" sz="3200" b="1" dirty="0">
+                <a:solidFill>
+                  <a:srgbClr val="990011"/>
+                </a:solidFill>
+                <a:latin typeface="Times New Roman" pitchFamily="34" charset="0"/>
+                <a:ea typeface="Times New Roman" pitchFamily="34" charset="-122"/>
+                <a:cs typeface="Times New Roman" pitchFamily="34" charset="-120"/>
+              </a:rPr>
+              <a:t>B) Disadvantages</a:t>
+            </a:r>
+            <a:endParaRPr lang="en-US" sz="3200" dirty="0"/>
+          </a:p>
+        </p:txBody>
+      </p:sp>
+      <p:sp>
+        <p:nvSpPr>
+          <p:cNvPr id="6" name="Text 3"/>
+          <p:cNvSpPr/>
+          <p:nvPr/>
+        </p:nvSpPr>
+        <p:spPr>
+          <a:xfrm>
+            <a:off x="2697480" y="2240280"/>
+            <a:ext cx="9174175" cy="4206240"/>
+          </a:xfrm>
+          <a:prstGeom prst="rect">
+            <a:avLst/>
+          </a:prstGeom>
+          <a:noFill/>
+          <a:ln/>
+        </p:spPr>
+        <p:txBody>
+          <a:bodyPr wrap="square" lIns="0" tIns="0" rIns="0" bIns="0" rtlCol="0" anchor="t"/>
+          <a:lstStyle/>
+          <a:p>
+            <a:pPr algn="l" indent="0" marL="0">
+              <a:spcAft>
+                <a:spcPts val="800"/>
+              </a:spcAft>
+              <a:buNone/>
+            </a:pPr>
+            <a:r>
+              <a:rPr lang="en-US" sz="4000" i="1" dirty="0">
+                <a:solidFill>
+                  <a:srgbClr val="111111"/>
+                </a:solidFill>
+                <a:latin typeface="Times New Roman" pitchFamily="34" charset="0"/>
+                <a:ea typeface="Times New Roman" pitchFamily="34" charset="-122"/>
+                <a:cs typeface="Times New Roman" pitchFamily="34" charset="-120"/>
+              </a:rPr>
+              <a:t>Road transport has the following disadvantages:</a:t>
+            </a:r>
+            <a:endParaRPr lang="en-US" sz="4000" dirty="0"/>
+          </a:p>
+          <a:p>
+            <a:pPr algn="l" indent="0" marL="0">
+              <a:spcAft>
+                <a:spcPts val="800"/>
+              </a:spcAft>
+              <a:buNone/>
+            </a:pPr>
+            <a:r>
+              <a:rPr lang="en-US" sz="4000" b="1" dirty="0">
+                <a:solidFill>
+                  <a:srgbClr val="111111"/>
+                </a:solidFill>
+                <a:latin typeface="Times New Roman" pitchFamily="34" charset="0"/>
+                <a:ea typeface="Times New Roman" pitchFamily="34" charset="-122"/>
+                <a:cs typeface="Times New Roman" pitchFamily="34" charset="-120"/>
+              </a:rPr>
+              <a:t>Accidents: </a:t>
+            </a:r>
+            <a:pPr algn="l" indent="0" marL="0">
+              <a:spcAft>
+                <a:spcPts val="800"/>
+              </a:spcAft>
+              <a:buNone/>
+            </a:pPr>
+            <a:r>
+              <a:rPr lang="en-US" sz="4000" dirty="0">
+                <a:solidFill>
+                  <a:srgbClr val="111111"/>
+                </a:solidFill>
+                <a:latin typeface="Times New Roman" pitchFamily="34" charset="0"/>
+                <a:ea typeface="Times New Roman" pitchFamily="34" charset="-122"/>
+                <a:cs typeface="Times New Roman" pitchFamily="34" charset="-120"/>
+              </a:rPr>
+              <a:t>Many people die on the roads.</a:t>
+            </a:r>
+            <a:endParaRPr lang="en-US" sz="4000" dirty="0"/>
+          </a:p>
+          <a:p>
+            <a:pPr algn="l" indent="0" marL="0">
+              <a:spcAft>
+                <a:spcPts val="800"/>
+              </a:spcAft>
+              <a:buNone/>
+            </a:pPr>
+            <a:r>
+              <a:rPr lang="en-US" sz="4000" b="1" dirty="0">
+                <a:solidFill>
+                  <a:srgbClr val="111111"/>
+                </a:solidFill>
+                <a:latin typeface="Times New Roman" pitchFamily="34" charset="0"/>
+                <a:ea typeface="Times New Roman" pitchFamily="34" charset="-122"/>
+                <a:cs typeface="Times New Roman" pitchFamily="34" charset="-120"/>
+              </a:rPr>
+              <a:t>Traffic jams: </a:t>
+            </a:r>
+            <a:pPr algn="l" indent="0" marL="0">
+              <a:spcAft>
+                <a:spcPts val="800"/>
+              </a:spcAft>
+              <a:buNone/>
+            </a:pPr>
+            <a:r>
+              <a:rPr lang="en-US" sz="4000" dirty="0">
+                <a:solidFill>
+                  <a:srgbClr val="111111"/>
+                </a:solidFill>
+                <a:latin typeface="Times New Roman" pitchFamily="34" charset="0"/>
+                <a:ea typeface="Times New Roman" pitchFamily="34" charset="-122"/>
+                <a:cs typeface="Times New Roman" pitchFamily="34" charset="-120"/>
+              </a:rPr>
+              <a:t>Towns are congested.</a:t>
+            </a:r>
+            <a:endParaRPr lang="en-US" sz="4000" dirty="0"/>
+          </a:p>
+          <a:p>
+            <a:pPr algn="l" indent="0" marL="0">
+              <a:spcAft>
+                <a:spcPts val="800"/>
+              </a:spcAft>
+              <a:buNone/>
+            </a:pPr>
+            <a:r>
+              <a:rPr lang="en-US" sz="4000" b="1" dirty="0">
+                <a:solidFill>
+                  <a:srgbClr val="111111"/>
+                </a:solidFill>
+                <a:latin typeface="Times New Roman" pitchFamily="34" charset="0"/>
+                <a:ea typeface="Times New Roman" pitchFamily="34" charset="-122"/>
+                <a:cs typeface="Times New Roman" pitchFamily="34" charset="-120"/>
+              </a:rPr>
+              <a:t>Air pollution: </a:t>
+            </a:r>
+            <a:pPr algn="l" indent="0" marL="0">
+              <a:spcAft>
+                <a:spcPts val="800"/>
+              </a:spcAft>
+              <a:buNone/>
+            </a:pPr>
+            <a:r>
+              <a:rPr lang="en-US" sz="4000" dirty="0">
+                <a:solidFill>
+                  <a:srgbClr val="111111"/>
+                </a:solidFill>
+                <a:latin typeface="Times New Roman" pitchFamily="34" charset="0"/>
+                <a:ea typeface="Times New Roman" pitchFamily="34" charset="-122"/>
+                <a:cs typeface="Times New Roman" pitchFamily="34" charset="-120"/>
+              </a:rPr>
+              <a:t>Vehicles give off smoke.</a:t>
+            </a:r>
+            <a:endParaRPr lang="en-US" sz="4000" dirty="0"/>
           </a:p>
         </p:txBody>
       </p:sp>
@@ -15621,7 +16032,7 @@
                 <a:ea typeface="Calibri" pitchFamily="34" charset="-122"/>
                 <a:cs typeface="Calibri" pitchFamily="34" charset="-120"/>
               </a:rPr>
-              <a:t>FORMATIVE EVALUATION</a:t>
+              <a:t>BOARD SUMMARY</a:t>
             </a:r>
             <a:endParaRPr lang="en-US" sz="1400" dirty="0"/>
           </a:p>
@@ -15686,7 +16097,7 @@
                 <a:ea typeface="Times New Roman" pitchFamily="34" charset="-122"/>
                 <a:cs typeface="Times New Roman" pitchFamily="34" charset="-120"/>
               </a:rPr>
-              <a:t>Evaluation 1</a:t>
+              <a:t>3. Advantages and Disadvantages</a:t>
             </a:r>
             <a:endParaRPr lang="en-US" sz="3600" dirty="0"/>
           </a:p>
@@ -15700,8 +16111,47 @@
         </p:nvSpPr>
         <p:spPr>
           <a:xfrm>
-            <a:off x="5349240" y="1783080"/>
-            <a:ext cx="6522415" cy="4663440"/>
+            <a:off x="5349240" y="1737360"/>
+            <a:ext cx="6522415" cy="457200"/>
+          </a:xfrm>
+          <a:prstGeom prst="rect">
+            <a:avLst/>
+          </a:prstGeom>
+          <a:noFill/>
+          <a:ln/>
+        </p:spPr>
+        <p:txBody>
+          <a:bodyPr wrap="square" lIns="0" tIns="0" rIns="0" bIns="0" rtlCol="0" anchor="ctr"/>
+          <a:lstStyle/>
+          <a:p>
+            <a:pPr algn="l" indent="0" marL="0">
+              <a:buNone/>
+            </a:pPr>
+            <a:r>
+              <a:rPr lang="en-US" sz="3200" b="1" dirty="0">
+                <a:solidFill>
+                  <a:srgbClr val="990011"/>
+                </a:solidFill>
+                <a:latin typeface="Times New Roman" pitchFamily="34" charset="0"/>
+                <a:ea typeface="Times New Roman" pitchFamily="34" charset="-122"/>
+                <a:cs typeface="Times New Roman" pitchFamily="34" charset="-120"/>
+              </a:rPr>
+              <a:t>B) Disadvantages (continued)</a:t>
+            </a:r>
+            <a:endParaRPr lang="en-US" sz="3200" dirty="0"/>
+          </a:p>
+        </p:txBody>
+      </p:sp>
+      <p:sp>
+        <p:nvSpPr>
+          <p:cNvPr id="6" name="Text 3"/>
+          <p:cNvSpPr/>
+          <p:nvPr/>
+        </p:nvSpPr>
+        <p:spPr>
+          <a:xfrm>
+            <a:off x="5349240" y="2240280"/>
+            <a:ext cx="6522415" cy="4206240"/>
           </a:xfrm>
           <a:prstGeom prst="rect">
             <a:avLst/>
@@ -15720,7 +16170,7 @@
               <a:buNone/>
             </a:pPr>
             <a:r>
-              <a:rPr lang="en-US" sz="4000" dirty="0">
+              <a:rPr lang="en-US" sz="4000" b="1" dirty="0">
                 <a:solidFill>
                   <a:srgbClr val="111111"/>
                 </a:solidFill>
@@ -15728,7 +16178,24 @@
                 <a:ea typeface="Times New Roman" pitchFamily="34" charset="-122"/>
                 <a:cs typeface="Times New Roman" pitchFamily="34" charset="-120"/>
               </a:rPr>
-              <a:t>Give two conditions for road development.</a:t>
+              <a:t>Small loads: </a:t>
+            </a:r>
+            <a:pPr algn="l" indent="0" marL="0">
+              <a:spcAft>
+                <a:spcPts val="800"/>
+              </a:spcAft>
+              <a:buNone/>
+            </a:pPr>
+            <a:r>
+              <a:rPr lang="en-US" sz="4000" dirty="0">
+                <a:solidFill>
+                  <a:srgbClr val="111111"/>
+                </a:solidFill>
+                <a:latin typeface="Times New Roman" pitchFamily="34" charset="0"/>
+                <a:ea typeface="Times New Roman" pitchFamily="34" charset="-122"/>
+                <a:cs typeface="Times New Roman" pitchFamily="34" charset="-120"/>
+              </a:rPr>
+              <a:t>It is costly over long distances.</a:t>
             </a:r>
             <a:endParaRPr lang="en-US" sz="4000" dirty="0"/>
           </a:p>
@@ -15840,15 +16307,54 @@
                 <a:ea typeface="Calibri" pitchFamily="34" charset="-122"/>
                 <a:cs typeface="Calibri" pitchFamily="34" charset="-120"/>
               </a:rPr>
-              <a:t>FORMATIVE EVALUATION</a:t>
+              <a:t>BOARD SUMMARY</a:t>
             </a:r>
             <a:endParaRPr lang="en-US" sz="1400" dirty="0"/>
+          </a:p>
+        </p:txBody>
+      </p:sp>
+      <p:sp>
+        <p:nvSpPr>
+          <p:cNvPr id="3" name="Text 1"/>
+          <p:cNvSpPr/>
+          <p:nvPr/>
+        </p:nvSpPr>
+        <p:spPr>
+          <a:xfrm>
+            <a:off x="457200" y="1005840"/>
+            <a:ext cx="11277295" cy="731520"/>
+          </a:xfrm>
+          <a:prstGeom prst="rect">
+            <a:avLst/>
+          </a:prstGeom>
+          <a:noFill/>
+          <a:ln/>
+        </p:spPr>
+        <p:txBody>
+          <a:bodyPr wrap="square" lIns="0" tIns="0" rIns="0" bIns="0" rtlCol="0" anchor="ctr"/>
+          <a:lstStyle/>
+          <a:p>
+            <a:pPr algn="ctr" indent="0" marL="0">
+              <a:buNone/>
+            </a:pPr>
+            <a:r>
+              <a:rPr lang="en-US" sz="3600" b="1" dirty="0">
+                <a:solidFill>
+                  <a:srgbClr val="990011"/>
+                </a:solidFill>
+                <a:latin typeface="Times New Roman" pitchFamily="34" charset="0"/>
+                <a:ea typeface="Times New Roman" pitchFamily="34" charset="-122"/>
+                <a:cs typeface="Times New Roman" pitchFamily="34" charset="-120"/>
+              </a:rPr>
+              <a:t>3. Advantages and Disadvantages</a:t>
+            </a:r>
+            <a:endParaRPr lang="en-US" sz="3600" dirty="0"/>
           </a:p>
         </p:txBody>
       </p:sp>
       <p:pic>
         <p:nvPicPr>
-          <p:cNvPr id="3" name="Image 0" descr="/home/claude/f4/img/minesec_sheet.png">    </p:cNvPr>
+          <p:cNvPr id="4" name="Image 0" descr="/home/claude/f4/img/v2/transport_costs_big.png">    </p:cNvPr>
           <p:cNvPicPr>
             <a:picLocks noChangeAspect="1"/>
           </p:cNvPicPr>
@@ -15862,8 +16368,8 @@
         </p:blipFill>
         <p:spPr>
           <a:xfrm>
-            <a:off x="0" y="658368"/>
-            <a:ext cx="5120640" cy="5833872"/>
+            <a:off x="1215564" y="1783080"/>
+            <a:ext cx="9760567" cy="4270248"/>
           </a:xfrm>
           <a:prstGeom prst="rect">
             <a:avLst/>
@@ -15872,14 +16378,14 @@
       </p:pic>
       <p:sp>
         <p:nvSpPr>
-          <p:cNvPr id="4" name="Text 1"/>
+          <p:cNvPr id="5" name="Text 2"/>
           <p:cNvSpPr/>
           <p:nvPr/>
         </p:nvSpPr>
         <p:spPr>
           <a:xfrm>
-            <a:off x="5349240" y="1005840"/>
-            <a:ext cx="6522415" cy="731520"/>
+            <a:off x="457200" y="6089904"/>
+            <a:ext cx="11277295" cy="347472"/>
           </a:xfrm>
           <a:prstGeom prst="rect">
             <a:avLst/>
@@ -15888,68 +16394,24 @@
           <a:ln/>
         </p:spPr>
         <p:txBody>
-          <a:bodyPr wrap="square" lIns="0" tIns="0" rIns="0" bIns="0" rtlCol="0" anchor="ctr">
-            <a:normAutofit/>
-          </a:bodyPr>
+          <a:bodyPr wrap="square" lIns="0" tIns="0" rIns="0" bIns="0" rtlCol="0" anchor="ctr"/>
           <a:lstStyle/>
           <a:p>
             <a:pPr algn="ctr" indent="0" marL="0">
               <a:buNone/>
             </a:pPr>
             <a:r>
-              <a:rPr lang="en-US" sz="3600" b="1" dirty="0">
-                <a:solidFill>
-                  <a:srgbClr val="990011"/>
+              <a:rPr lang="en-US" sz="1800" i="1" dirty="0">
+                <a:solidFill>
+                  <a:srgbClr val="555555"/>
                 </a:solidFill>
                 <a:latin typeface="Times New Roman" pitchFamily="34" charset="0"/>
                 <a:ea typeface="Times New Roman" pitchFamily="34" charset="-122"/>
                 <a:cs typeface="Times New Roman" pitchFamily="34" charset="-120"/>
               </a:rPr>
-              <a:t>Expected Answer</a:t>
-            </a:r>
-            <a:endParaRPr lang="en-US" sz="3600" dirty="0"/>
-          </a:p>
-        </p:txBody>
-      </p:sp>
-      <p:sp>
-        <p:nvSpPr>
-          <p:cNvPr id="5" name="Text 2"/>
-          <p:cNvSpPr/>
-          <p:nvPr/>
-        </p:nvSpPr>
-        <p:spPr>
-          <a:xfrm>
-            <a:off x="5349240" y="1783080"/>
-            <a:ext cx="6522415" cy="4663440"/>
-          </a:xfrm>
-          <a:prstGeom prst="rect">
-            <a:avLst/>
-          </a:prstGeom>
-          <a:noFill/>
-          <a:ln/>
-        </p:spPr>
-        <p:txBody>
-          <a:bodyPr wrap="square" lIns="0" tIns="0" rIns="0" bIns="0" rtlCol="0" anchor="t"/>
-          <a:lstStyle/>
-          <a:p>
-            <a:pPr algn="l" indent="0" marL="0">
-              <a:spcAft>
-                <a:spcPts val="800"/>
-              </a:spcAft>
-              <a:buNone/>
-            </a:pPr>
-            <a:r>
-              <a:rPr lang="en-US" sz="4000" dirty="0">
-                <a:solidFill>
-                  <a:srgbClr val="111111"/>
-                </a:solidFill>
-                <a:latin typeface="Times New Roman" pitchFamily="34" charset="0"/>
-                <a:ea typeface="Times New Roman" pitchFamily="34" charset="-122"/>
-                <a:cs typeface="Times New Roman" pitchFamily="34" charset="-120"/>
-              </a:rPr>
-              <a:t>Flat relief and capital.</a:t>
-            </a:r>
-            <a:endParaRPr lang="en-US" sz="4000" dirty="0"/>
+              <a:t>Illustration: transport costs and distance</a:t>
+            </a:r>
+            <a:endParaRPr lang="en-US" sz="1800" dirty="0"/>
           </a:p>
         </p:txBody>
       </p:sp>
@@ -16124,7 +16586,7 @@
                 <a:ea typeface="Times New Roman" pitchFamily="34" charset="-122"/>
                 <a:cs typeface="Times New Roman" pitchFamily="34" charset="-120"/>
               </a:rPr>
-              <a:t>Evaluation 2</a:t>
+              <a:t>Evaluation 1</a:t>
             </a:r>
             <a:endParaRPr lang="en-US" sz="3600" dirty="0"/>
           </a:p>
@@ -16166,7 +16628,7 @@
                 <a:ea typeface="Times New Roman" pitchFamily="34" charset="-122"/>
                 <a:cs typeface="Times New Roman" pitchFamily="34" charset="-120"/>
               </a:rPr>
-              <a:t>Give one advantage and one disadvantage of road transport.</a:t>
+              <a:t>Give two conditions for road development.</a:t>
             </a:r>
             <a:endParaRPr lang="en-US" sz="4000" dirty="0"/>
           </a:p>
@@ -16385,7 +16847,7 @@
                 <a:ea typeface="Times New Roman" pitchFamily="34" charset="-122"/>
                 <a:cs typeface="Times New Roman" pitchFamily="34" charset="-120"/>
               </a:rPr>
-              <a:t>Door-to-door service; accidents.</a:t>
+              <a:t>Flat relief and capital.</a:t>
             </a:r>
             <a:endParaRPr lang="en-US" sz="4000" dirty="0"/>
           </a:p>
@@ -16497,7 +16959,7 @@
                 <a:ea typeface="Calibri" pitchFamily="34" charset="-122"/>
                 <a:cs typeface="Calibri" pitchFamily="34" charset="-120"/>
               </a:rPr>
-              <a:t>REMEDIATION</a:t>
+              <a:t>FORMATIVE EVALUATION</a:t>
             </a:r>
             <a:endParaRPr lang="en-US" sz="1400" dirty="0"/>
           </a:p>
@@ -16520,7 +16982,7 @@
         <p:spPr>
           <a:xfrm>
             <a:off x="0" y="658368"/>
-            <a:ext cx="2468880" cy="5833872"/>
+            <a:ext cx="5120640" cy="5833872"/>
           </a:xfrm>
           <a:prstGeom prst="rect">
             <a:avLst/>
@@ -16535,8 +16997,8 @@
         </p:nvSpPr>
         <p:spPr>
           <a:xfrm>
-            <a:off x="2697480" y="1005840"/>
-            <a:ext cx="9174175" cy="731520"/>
+            <a:off x="5349240" y="1005840"/>
+            <a:ext cx="6522415" cy="731520"/>
           </a:xfrm>
           <a:prstGeom prst="rect">
             <a:avLst/>
@@ -16562,7 +17024,7 @@
                 <a:ea typeface="Times New Roman" pitchFamily="34" charset="-122"/>
                 <a:cs typeface="Times New Roman" pitchFamily="34" charset="-120"/>
               </a:rPr>
-              <a:t>Remediation</a:t>
+              <a:t>Evaluation 2</a:t>
             </a:r>
             <a:endParaRPr lang="en-US" sz="3600" dirty="0"/>
           </a:p>
@@ -16576,8 +17038,8 @@
         </p:nvSpPr>
         <p:spPr>
           <a:xfrm>
-            <a:off x="2697480" y="1783080"/>
-            <a:ext cx="9174175" cy="4663440"/>
+            <a:off x="5349240" y="1783080"/>
+            <a:ext cx="6522415" cy="4663440"/>
           </a:xfrm>
           <a:prstGeom prst="rect">
             <a:avLst/>
@@ -16596,7 +17058,7 @@
               <a:buNone/>
             </a:pPr>
             <a:r>
-              <a:rPr lang="en-US" sz="4000" b="1" dirty="0">
+              <a:rPr lang="en-US" sz="4000" dirty="0">
                 <a:solidFill>
                   <a:srgbClr val="111111"/>
                 </a:solidFill>
@@ -16604,73 +17066,7 @@
                 <a:ea typeface="Times New Roman" pitchFamily="34" charset="-122"/>
                 <a:cs typeface="Times New Roman" pitchFamily="34" charset="-120"/>
               </a:rPr>
-              <a:t>Fill in the blanks:</a:t>
-            </a:r>
-            <a:endParaRPr lang="en-US" sz="4000" dirty="0"/>
-          </a:p>
-          <a:p>
-            <a:pPr algn="l" marL="342900" indent="-342900">
-              <a:spcAft>
-                <a:spcPts val="800"/>
-              </a:spcAft>
-              <a:buSzPct val="100000"/>
-              <a:buFont typeface="+mj-lt"/>
-              <a:buAutoNum type="arabicPeriod" startAt="1"/>
-            </a:pPr>
-            <a:r>
-              <a:rPr lang="en-US" sz="4000" dirty="0">
-                <a:solidFill>
-                  <a:srgbClr val="111111"/>
-                </a:solidFill>
-                <a:latin typeface="Times New Roman" pitchFamily="34" charset="0"/>
-                <a:ea typeface="Times New Roman" pitchFamily="34" charset="-122"/>
-                <a:cs typeface="Times New Roman" pitchFamily="34" charset="-120"/>
-              </a:rPr>
-              <a:t>A road covered with asphalt is a ______ road.</a:t>
-            </a:r>
-            <a:endParaRPr lang="en-US" sz="4000" dirty="0"/>
-          </a:p>
-          <a:p>
-            <a:pPr algn="l" marL="342900" indent="-342900">
-              <a:spcAft>
-                <a:spcPts val="800"/>
-              </a:spcAft>
-              <a:buSzPct val="100000"/>
-              <a:buFont typeface="+mj-lt"/>
-              <a:buAutoNum type="arabicPeriod" startAt="1"/>
-            </a:pPr>
-            <a:r>
-              <a:rPr lang="en-US" sz="4000" dirty="0">
-                <a:solidFill>
-                  <a:srgbClr val="111111"/>
-                </a:solidFill>
-                <a:latin typeface="Times New Roman" pitchFamily="34" charset="0"/>
-                <a:ea typeface="Times New Roman" pitchFamily="34" charset="-122"/>
-                <a:cs typeface="Times New Roman" pitchFamily="34" charset="-120"/>
-              </a:rPr>
-              <a:t>Road transport gives ______ service.</a:t>
-            </a:r>
-            <a:endParaRPr lang="en-US" sz="4000" dirty="0"/>
-          </a:p>
-          <a:p>
-            <a:pPr algn="l" marL="342900" indent="-342900">
-              <a:spcAft>
-                <a:spcPts val="800"/>
-              </a:spcAft>
-              <a:buSzPct val="100000"/>
-              <a:buFont typeface="+mj-lt"/>
-              <a:buAutoNum type="arabicPeriod" startAt="1"/>
-            </a:pPr>
-            <a:r>
-              <a:rPr lang="en-US" sz="4000" dirty="0">
-                <a:solidFill>
-                  <a:srgbClr val="111111"/>
-                </a:solidFill>
-                <a:latin typeface="Times New Roman" pitchFamily="34" charset="0"/>
-                <a:ea typeface="Times New Roman" pitchFamily="34" charset="-122"/>
-                <a:cs typeface="Times New Roman" pitchFamily="34" charset="-120"/>
-              </a:rPr>
-              <a:t>Road transport causes air ______.</a:t>
+              <a:t>Give one advantage and one disadvantage of road transport.</a:t>
             </a:r>
             <a:endParaRPr lang="en-US" sz="4000" dirty="0"/>
           </a:p>
@@ -16782,7 +17178,7 @@
                 <a:ea typeface="Calibri" pitchFamily="34" charset="-122"/>
                 <a:cs typeface="Calibri" pitchFamily="34" charset="-120"/>
               </a:rPr>
-              <a:t>HOMEWORK</a:t>
+              <a:t>FORMATIVE EVALUATION</a:t>
             </a:r>
             <a:endParaRPr lang="en-US" sz="1400" dirty="0"/>
           </a:p>
@@ -16847,7 +17243,7 @@
                 <a:ea typeface="Times New Roman" pitchFamily="34" charset="-122"/>
                 <a:cs typeface="Times New Roman" pitchFamily="34" charset="-120"/>
               </a:rPr>
-              <a:t>Homework</a:t>
+              <a:t>Expected Answer</a:t>
             </a:r>
             <a:endParaRPr lang="en-US" sz="3600" dirty="0"/>
           </a:p>
@@ -16889,7 +17285,7 @@
                 <a:ea typeface="Times New Roman" pitchFamily="34" charset="-122"/>
                 <a:cs typeface="Times New Roman" pitchFamily="34" charset="-120"/>
               </a:rPr>
-              <a:t>Describe the state of the road leading to your village and propose two improvements.</a:t>
+              <a:t>Door-to-door service; accidents.</a:t>
             </a:r>
             <a:endParaRPr lang="en-US" sz="4000" dirty="0"/>
           </a:p>
@@ -17001,7 +17397,7 @@
                 <a:ea typeface="Calibri" pitchFamily="34" charset="-122"/>
                 <a:cs typeface="Calibri" pitchFamily="34" charset="-120"/>
               </a:rPr>
-              <a:t>NEXT LESSON</a:t>
+              <a:t>REMEDIATION</a:t>
             </a:r>
             <a:endParaRPr lang="en-US" sz="1400" dirty="0"/>
           </a:p>
@@ -17024,7 +17420,7 @@
         <p:spPr>
           <a:xfrm>
             <a:off x="0" y="658368"/>
-            <a:ext cx="5120640" cy="5833872"/>
+            <a:ext cx="2468880" cy="5833872"/>
           </a:xfrm>
           <a:prstGeom prst="rect">
             <a:avLst/>
@@ -17039,8 +17435,8 @@
         </p:nvSpPr>
         <p:spPr>
           <a:xfrm>
-            <a:off x="5349240" y="1005840"/>
-            <a:ext cx="6522415" cy="731520"/>
+            <a:off x="2697480" y="1005840"/>
+            <a:ext cx="9174175" cy="731520"/>
           </a:xfrm>
           <a:prstGeom prst="rect">
             <a:avLst/>
@@ -17066,7 +17462,7 @@
                 <a:ea typeface="Times New Roman" pitchFamily="34" charset="-122"/>
                 <a:cs typeface="Times New Roman" pitchFamily="34" charset="-120"/>
               </a:rPr>
-              <a:t>Next Lesson</a:t>
+              <a:t>Remediation</a:t>
             </a:r>
             <a:endParaRPr lang="en-US" sz="3600" dirty="0"/>
           </a:p>
@@ -17080,8 +17476,8 @@
         </p:nvSpPr>
         <p:spPr>
           <a:xfrm>
-            <a:off x="5349240" y="1783080"/>
-            <a:ext cx="6522415" cy="4663440"/>
+            <a:off x="2697480" y="1783080"/>
+            <a:ext cx="9174175" cy="4663440"/>
           </a:xfrm>
           <a:prstGeom prst="rect">
             <a:avLst/>
@@ -17090,10 +17486,10 @@
           <a:ln/>
         </p:spPr>
         <p:txBody>
-          <a:bodyPr wrap="square" lIns="0" tIns="0" rIns="0" bIns="0" rtlCol="0" anchor="ctr"/>
-          <a:lstStyle/>
-          <a:p>
-            <a:pPr algn="ctr" indent="0" marL="0">
+          <a:bodyPr wrap="square" lIns="0" tIns="0" rIns="0" bIns="0" rtlCol="0" anchor="t"/>
+          <a:lstStyle/>
+          <a:p>
+            <a:pPr algn="l" indent="0" marL="0">
               <a:spcAft>
                 <a:spcPts val="800"/>
               </a:spcAft>
@@ -17108,27 +17504,73 @@
                 <a:ea typeface="Times New Roman" pitchFamily="34" charset="-122"/>
                 <a:cs typeface="Times New Roman" pitchFamily="34" charset="-120"/>
               </a:rPr>
-              <a:t>Our next lesson will be on:</a:t>
+              <a:t>Fill in the blanks:</a:t>
             </a:r>
             <a:endParaRPr lang="en-US" sz="4000" dirty="0"/>
           </a:p>
           <a:p>
-            <a:pPr algn="ctr" indent="0" marL="0">
+            <a:pPr algn="l" marL="342900" indent="-342900">
               <a:spcAft>
                 <a:spcPts val="800"/>
               </a:spcAft>
-              <a:buNone/>
+              <a:buSzPct val="100000"/>
+              <a:buFont typeface="+mj-lt"/>
+              <a:buAutoNum type="arabicPeriod" startAt="1"/>
             </a:pPr>
             <a:r>
-              <a:rPr lang="en-US" sz="4000" b="1" dirty="0">
-                <a:solidFill>
-                  <a:srgbClr val="990011"/>
+              <a:rPr lang="en-US" sz="4000" dirty="0">
+                <a:solidFill>
+                  <a:srgbClr val="111111"/>
                 </a:solidFill>
                 <a:latin typeface="Times New Roman" pitchFamily="34" charset="0"/>
                 <a:ea typeface="Times New Roman" pitchFamily="34" charset="-122"/>
                 <a:cs typeface="Times New Roman" pitchFamily="34" charset="-120"/>
               </a:rPr>
-              <a:t>Lesson 9: Development of Rail Transport</a:t>
+              <a:t>A road covered with asphalt is a ______ road.</a:t>
+            </a:r>
+            <a:endParaRPr lang="en-US" sz="4000" dirty="0"/>
+          </a:p>
+          <a:p>
+            <a:pPr algn="l" marL="342900" indent="-342900">
+              <a:spcAft>
+                <a:spcPts val="800"/>
+              </a:spcAft>
+              <a:buSzPct val="100000"/>
+              <a:buFont typeface="+mj-lt"/>
+              <a:buAutoNum type="arabicPeriod" startAt="1"/>
+            </a:pPr>
+            <a:r>
+              <a:rPr lang="en-US" sz="4000" dirty="0">
+                <a:solidFill>
+                  <a:srgbClr val="111111"/>
+                </a:solidFill>
+                <a:latin typeface="Times New Roman" pitchFamily="34" charset="0"/>
+                <a:ea typeface="Times New Roman" pitchFamily="34" charset="-122"/>
+                <a:cs typeface="Times New Roman" pitchFamily="34" charset="-120"/>
+              </a:rPr>
+              <a:t>Road transport gives ______ service.</a:t>
+            </a:r>
+            <a:endParaRPr lang="en-US" sz="4000" dirty="0"/>
+          </a:p>
+          <a:p>
+            <a:pPr algn="l" marL="342900" indent="-342900">
+              <a:spcAft>
+                <a:spcPts val="800"/>
+              </a:spcAft>
+              <a:buSzPct val="100000"/>
+              <a:buFont typeface="+mj-lt"/>
+              <a:buAutoNum type="arabicPeriod" startAt="1"/>
+            </a:pPr>
+            <a:r>
+              <a:rPr lang="en-US" sz="4000" dirty="0">
+                <a:solidFill>
+                  <a:srgbClr val="111111"/>
+                </a:solidFill>
+                <a:latin typeface="Times New Roman" pitchFamily="34" charset="0"/>
+                <a:ea typeface="Times New Roman" pitchFamily="34" charset="-122"/>
+                <a:cs typeface="Times New Roman" pitchFamily="34" charset="-120"/>
+              </a:rPr>
+              <a:t>Road transport causes air ______.</a:t>
             </a:r>
             <a:endParaRPr lang="en-US" sz="4000" dirty="0"/>
           </a:p>
@@ -17240,6 +17682,683 @@
                 <a:ea typeface="Calibri" pitchFamily="34" charset="-122"/>
                 <a:cs typeface="Calibri" pitchFamily="34" charset="-120"/>
               </a:rPr>
+              <a:t>HOMEWORK</a:t>
+            </a:r>
+            <a:endParaRPr lang="en-US" sz="1400" dirty="0"/>
+          </a:p>
+        </p:txBody>
+      </p:sp>
+      <p:pic>
+        <p:nvPicPr>
+          <p:cNvPr id="3" name="Image 0" descr="/home/claude/f4/img/minesec_sheet.png">    </p:cNvPr>
+          <p:cNvPicPr>
+            <a:picLocks noChangeAspect="1"/>
+          </p:cNvPicPr>
+          <p:nvPr/>
+        </p:nvPicPr>
+        <p:blipFill>
+          <a:blip r:embed="rId1"/>
+          <a:stretch>
+            <a:fillRect/>
+          </a:stretch>
+        </p:blipFill>
+        <p:spPr>
+          <a:xfrm>
+            <a:off x="0" y="658368"/>
+            <a:ext cx="5120640" cy="5833872"/>
+          </a:xfrm>
+          <a:prstGeom prst="rect">
+            <a:avLst/>
+          </a:prstGeom>
+        </p:spPr>
+      </p:pic>
+      <p:sp>
+        <p:nvSpPr>
+          <p:cNvPr id="4" name="Text 1"/>
+          <p:cNvSpPr/>
+          <p:nvPr/>
+        </p:nvSpPr>
+        <p:spPr>
+          <a:xfrm>
+            <a:off x="5349240" y="1005840"/>
+            <a:ext cx="6522415" cy="731520"/>
+          </a:xfrm>
+          <a:prstGeom prst="rect">
+            <a:avLst/>
+          </a:prstGeom>
+          <a:noFill/>
+          <a:ln/>
+        </p:spPr>
+        <p:txBody>
+          <a:bodyPr wrap="square" lIns="0" tIns="0" rIns="0" bIns="0" rtlCol="0" anchor="ctr">
+            <a:normAutofit/>
+          </a:bodyPr>
+          <a:lstStyle/>
+          <a:p>
+            <a:pPr algn="ctr" indent="0" marL="0">
+              <a:buNone/>
+            </a:pPr>
+            <a:r>
+              <a:rPr lang="en-US" sz="3600" b="1" dirty="0">
+                <a:solidFill>
+                  <a:srgbClr val="990011"/>
+                </a:solidFill>
+                <a:latin typeface="Times New Roman" pitchFamily="34" charset="0"/>
+                <a:ea typeface="Times New Roman" pitchFamily="34" charset="-122"/>
+                <a:cs typeface="Times New Roman" pitchFamily="34" charset="-120"/>
+              </a:rPr>
+              <a:t>Homework</a:t>
+            </a:r>
+            <a:endParaRPr lang="en-US" sz="3600" dirty="0"/>
+          </a:p>
+        </p:txBody>
+      </p:sp>
+      <p:sp>
+        <p:nvSpPr>
+          <p:cNvPr id="5" name="Text 2"/>
+          <p:cNvSpPr/>
+          <p:nvPr/>
+        </p:nvSpPr>
+        <p:spPr>
+          <a:xfrm>
+            <a:off x="5349240" y="1783080"/>
+            <a:ext cx="6522415" cy="4663440"/>
+          </a:xfrm>
+          <a:prstGeom prst="rect">
+            <a:avLst/>
+          </a:prstGeom>
+          <a:noFill/>
+          <a:ln/>
+        </p:spPr>
+        <p:txBody>
+          <a:bodyPr wrap="square" lIns="0" tIns="0" rIns="0" bIns="0" rtlCol="0" anchor="t"/>
+          <a:lstStyle/>
+          <a:p>
+            <a:pPr algn="l" indent="0" marL="0">
+              <a:spcAft>
+                <a:spcPts val="800"/>
+              </a:spcAft>
+              <a:buNone/>
+            </a:pPr>
+            <a:r>
+              <a:rPr lang="en-US" sz="4000" dirty="0">
+                <a:solidFill>
+                  <a:srgbClr val="111111"/>
+                </a:solidFill>
+                <a:latin typeface="Times New Roman" pitchFamily="34" charset="0"/>
+                <a:ea typeface="Times New Roman" pitchFamily="34" charset="-122"/>
+                <a:cs typeface="Times New Roman" pitchFamily="34" charset="-120"/>
+              </a:rPr>
+              <a:t>Describe the state of the road leading to your village and propose two improvements.</a:t>
+            </a:r>
+            <a:endParaRPr lang="en-US" sz="4000" dirty="0"/>
+          </a:p>
+        </p:txBody>
+      </p:sp>
+      <p:sp>
+        <p:nvSpPr>
+          <p:cNvPr id="25" name="Slide Number Placeholder 0"/>
+          <p:cNvSpPr>
+            <a:spLocks noGrp="1"/>
+          </p:cNvSpPr>
+          <p:nvPr>
+            <p:ph type="sldNum" sz="quarter" idx="4294967295"/>
+          </p:nvPr>
+        </p:nvSpPr>
+        <p:spPr>
+          <a:xfrm>
+            <a:off x="27432" y="91440"/>
+            <a:ext cx="585216" cy="475488"/>
+          </a:xfrm>
+          <a:prstGeom prst="rect">
+            <a:avLst/>
+          </a:prstGeom>
+          <a:extLst>
+            <a:ext uri="{C572A759-6A51-4108-AA02-DFA0A04FC94B}">
+              <ma14:wrappingTextBoxFlag xmlns:ma14="http://schemas.microsoft.com/office/mac/drawingml/2011/main" val="0"/>
+            </a:ext>
+          </a:extLst>
+        </p:spPr>
+        <p:txBody>
+          <a:bodyPr/>
+          <a:lstStyle>
+            <a:lvl1pPr>
+              <a:defRPr sz="2000">
+                <a:solidFill>
+                  <a:srgbClr val="FFFFFF"/>
+                </a:solidFill>
+                <a:latin typeface="Calibri"/>
+                <a:ea typeface="Calibri"/>
+                <a:cs typeface="Calibri"/>
+              </a:defRPr>
+            </a:lvl1pPr>
+          </a:lstStyle>
+          <a:p>
+            <a:pPr algn="ctr"/>
+            <a:fld id="{F7021451-1387-4CA6-816F-3879F97B5CBC}" type="slidenum">
+              <a:rPr b="1" lang="en-US"/>
+              <a:t>49</a:t>
+            </a:fld>
+            <a:endParaRPr lang="en-US"/>
+          </a:p>
+        </p:txBody>
+      </p:sp>
+    </p:spTree>
+  </p:cSld>
+  <p:clrMapOvr>
+    <a:masterClrMapping/>
+  </p:clrMapOvr>
+</p:sld>
+</file>
+
+<file path=ppt/slides/slide5.xml><?xml version="1.0" encoding="utf-8"?>
+<p:sld xmlns:a="http://schemas.openxmlformats.org/drawingml/2006/main" xmlns:r="http://schemas.openxmlformats.org/officeDocument/2006/relationships" xmlns:p="http://schemas.openxmlformats.org/presentationml/2006/main">
+  <p:cSld name="Slide 5">
+    <p:spTree>
+      <p:nvGrpSpPr>
+        <p:cNvPr id="1" name=""/>
+        <p:cNvGrpSpPr/>
+        <p:nvPr/>
+      </p:nvGrpSpPr>
+      <p:grpSpPr>
+        <a:xfrm>
+          <a:off x="0" y="0"/>
+          <a:ext cx="0" cy="0"/>
+          <a:chOff x="0" y="0"/>
+          <a:chExt cx="0" cy="0"/>
+        </a:xfrm>
+      </p:grpSpPr>
+      <p:sp>
+        <p:nvSpPr>
+          <p:cNvPr id="2" name="Text 0"/>
+          <p:cNvSpPr/>
+          <p:nvPr/>
+        </p:nvSpPr>
+        <p:spPr>
+          <a:xfrm>
+            <a:off x="457200" y="713232"/>
+            <a:ext cx="11368735" cy="274320"/>
+          </a:xfrm>
+          <a:prstGeom prst="rect">
+            <a:avLst/>
+          </a:prstGeom>
+          <a:noFill/>
+          <a:ln/>
+        </p:spPr>
+        <p:txBody>
+          <a:bodyPr wrap="square" lIns="0" tIns="0" rIns="0" bIns="0" rtlCol="0" anchor="ctr"/>
+          <a:lstStyle/>
+          <a:p>
+            <a:pPr algn="r" indent="0" marL="0">
+              <a:buNone/>
+            </a:pPr>
+            <a:r>
+              <a:rPr lang="en-US" sz="1400" b="1" dirty="0">
+                <a:solidFill>
+                  <a:srgbClr val="1C3F6E"/>
+                </a:solidFill>
+                <a:latin typeface="Calibri" pitchFamily="34" charset="0"/>
+                <a:ea typeface="Calibri" pitchFamily="34" charset="-122"/>
+                <a:cs typeface="Calibri" pitchFamily="34" charset="-120"/>
+              </a:rPr>
+              <a:t>HOMEWORK CORRECTION</a:t>
+            </a:r>
+            <a:endParaRPr lang="en-US" sz="1400" dirty="0"/>
+          </a:p>
+        </p:txBody>
+      </p:sp>
+      <p:pic>
+        <p:nvPicPr>
+          <p:cNvPr id="3" name="Image 0" descr="/home/claude/f4/img/minesec_sheet.png">    </p:cNvPr>
+          <p:cNvPicPr>
+            <a:picLocks noChangeAspect="1"/>
+          </p:cNvPicPr>
+          <p:nvPr/>
+        </p:nvPicPr>
+        <p:blipFill>
+          <a:blip r:embed="rId1"/>
+          <a:stretch>
+            <a:fillRect/>
+          </a:stretch>
+        </p:blipFill>
+        <p:spPr>
+          <a:xfrm>
+            <a:off x="0" y="658368"/>
+            <a:ext cx="5120640" cy="5833872"/>
+          </a:xfrm>
+          <a:prstGeom prst="rect">
+            <a:avLst/>
+          </a:prstGeom>
+        </p:spPr>
+      </p:pic>
+      <p:sp>
+        <p:nvSpPr>
+          <p:cNvPr id="4" name="Text 1"/>
+          <p:cNvSpPr/>
+          <p:nvPr/>
+        </p:nvSpPr>
+        <p:spPr>
+          <a:xfrm>
+            <a:off x="5349240" y="1005840"/>
+            <a:ext cx="6522415" cy="731520"/>
+          </a:xfrm>
+          <a:prstGeom prst="rect">
+            <a:avLst/>
+          </a:prstGeom>
+          <a:noFill/>
+          <a:ln/>
+        </p:spPr>
+        <p:txBody>
+          <a:bodyPr wrap="square" lIns="0" tIns="0" rIns="0" bIns="0" rtlCol="0" anchor="ctr">
+            <a:normAutofit/>
+          </a:bodyPr>
+          <a:lstStyle/>
+          <a:p>
+            <a:pPr algn="ctr" indent="0" marL="0">
+              <a:buNone/>
+            </a:pPr>
+            <a:r>
+              <a:rPr lang="en-US" sz="3600" b="1" dirty="0">
+                <a:solidFill>
+                  <a:srgbClr val="990011"/>
+                </a:solidFill>
+                <a:latin typeface="Times New Roman" pitchFamily="34" charset="0"/>
+                <a:ea typeface="Times New Roman" pitchFamily="34" charset="-122"/>
+                <a:cs typeface="Times New Roman" pitchFamily="34" charset="-120"/>
+              </a:rPr>
+              <a:t>Correction: Possible Answer</a:t>
+            </a:r>
+            <a:endParaRPr lang="en-US" sz="3600" dirty="0"/>
+          </a:p>
+        </p:txBody>
+      </p:sp>
+      <p:sp>
+        <p:nvSpPr>
+          <p:cNvPr id="5" name="Text 2"/>
+          <p:cNvSpPr/>
+          <p:nvPr/>
+        </p:nvSpPr>
+        <p:spPr>
+          <a:xfrm>
+            <a:off x="5349240" y="1783080"/>
+            <a:ext cx="6522415" cy="4663440"/>
+          </a:xfrm>
+          <a:prstGeom prst="rect">
+            <a:avLst/>
+          </a:prstGeom>
+          <a:noFill/>
+          <a:ln/>
+        </p:spPr>
+        <p:txBody>
+          <a:bodyPr wrap="square" lIns="0" tIns="0" rIns="0" bIns="0" rtlCol="0" anchor="t"/>
+          <a:lstStyle/>
+          <a:p>
+            <a:pPr algn="l" indent="0" marL="0">
+              <a:spcAft>
+                <a:spcPts val="800"/>
+              </a:spcAft>
+              <a:buNone/>
+            </a:pPr>
+            <a:r>
+              <a:rPr lang="en-US" sz="4000" dirty="0">
+                <a:solidFill>
+                  <a:srgbClr val="111111"/>
+                </a:solidFill>
+                <a:latin typeface="Times New Roman" pitchFamily="34" charset="0"/>
+                <a:ea typeface="Times New Roman" pitchFamily="34" charset="-122"/>
+                <a:cs typeface="Times New Roman" pitchFamily="34" charset="-120"/>
+              </a:rPr>
+              <a:t>Transport: foot, bicycle, motorbike, taxi, bus; telecommunication: mobile phone, radio, television, internet.</a:t>
+            </a:r>
+            <a:endParaRPr lang="en-US" sz="4000" dirty="0"/>
+          </a:p>
+        </p:txBody>
+      </p:sp>
+      <p:sp>
+        <p:nvSpPr>
+          <p:cNvPr id="25" name="Slide Number Placeholder 0"/>
+          <p:cNvSpPr>
+            <a:spLocks noGrp="1"/>
+          </p:cNvSpPr>
+          <p:nvPr>
+            <p:ph type="sldNum" sz="quarter" idx="4294967295"/>
+          </p:nvPr>
+        </p:nvSpPr>
+        <p:spPr>
+          <a:xfrm>
+            <a:off x="27432" y="91440"/>
+            <a:ext cx="585216" cy="475488"/>
+          </a:xfrm>
+          <a:prstGeom prst="rect">
+            <a:avLst/>
+          </a:prstGeom>
+          <a:extLst>
+            <a:ext uri="{C572A759-6A51-4108-AA02-DFA0A04FC94B}">
+              <ma14:wrappingTextBoxFlag xmlns:ma14="http://schemas.microsoft.com/office/mac/drawingml/2011/main" val="0"/>
+            </a:ext>
+          </a:extLst>
+        </p:spPr>
+        <p:txBody>
+          <a:bodyPr/>
+          <a:lstStyle>
+            <a:lvl1pPr>
+              <a:defRPr sz="2000">
+                <a:solidFill>
+                  <a:srgbClr val="FFFFFF"/>
+                </a:solidFill>
+                <a:latin typeface="Calibri"/>
+                <a:ea typeface="Calibri"/>
+                <a:cs typeface="Calibri"/>
+              </a:defRPr>
+            </a:lvl1pPr>
+          </a:lstStyle>
+          <a:p>
+            <a:pPr algn="ctr"/>
+            <a:fld id="{F7021451-1387-4CA6-816F-3879F97B5CBC}" type="slidenum">
+              <a:rPr b="1" lang="en-US"/>
+              <a:t>5</a:t>
+            </a:fld>
+            <a:endParaRPr lang="en-US"/>
+          </a:p>
+        </p:txBody>
+      </p:sp>
+    </p:spTree>
+  </p:cSld>
+  <p:clrMapOvr>
+    <a:masterClrMapping/>
+  </p:clrMapOvr>
+</p:sld>
+</file>
+
+<file path=ppt/slides/slide50.xml><?xml version="1.0" encoding="utf-8"?>
+<p:sld xmlns:a="http://schemas.openxmlformats.org/drawingml/2006/main" xmlns:r="http://schemas.openxmlformats.org/officeDocument/2006/relationships" xmlns:p="http://schemas.openxmlformats.org/presentationml/2006/main">
+  <p:cSld name="Slide 50">
+    <p:spTree>
+      <p:nvGrpSpPr>
+        <p:cNvPr id="1" name=""/>
+        <p:cNvGrpSpPr/>
+        <p:nvPr/>
+      </p:nvGrpSpPr>
+      <p:grpSpPr>
+        <a:xfrm>
+          <a:off x="0" y="0"/>
+          <a:ext cx="0" cy="0"/>
+          <a:chOff x="0" y="0"/>
+          <a:chExt cx="0" cy="0"/>
+        </a:xfrm>
+      </p:grpSpPr>
+      <p:sp>
+        <p:nvSpPr>
+          <p:cNvPr id="2" name="Text 0"/>
+          <p:cNvSpPr/>
+          <p:nvPr/>
+        </p:nvSpPr>
+        <p:spPr>
+          <a:xfrm>
+            <a:off x="457200" y="713232"/>
+            <a:ext cx="11368735" cy="274320"/>
+          </a:xfrm>
+          <a:prstGeom prst="rect">
+            <a:avLst/>
+          </a:prstGeom>
+          <a:noFill/>
+          <a:ln/>
+        </p:spPr>
+        <p:txBody>
+          <a:bodyPr wrap="square" lIns="0" tIns="0" rIns="0" bIns="0" rtlCol="0" anchor="ctr"/>
+          <a:lstStyle/>
+          <a:p>
+            <a:pPr algn="r" indent="0" marL="0">
+              <a:buNone/>
+            </a:pPr>
+            <a:r>
+              <a:rPr lang="en-US" sz="1400" b="1" dirty="0">
+                <a:solidFill>
+                  <a:srgbClr val="1C3F6E"/>
+                </a:solidFill>
+                <a:latin typeface="Calibri" pitchFamily="34" charset="0"/>
+                <a:ea typeface="Calibri" pitchFamily="34" charset="-122"/>
+                <a:cs typeface="Calibri" pitchFamily="34" charset="-120"/>
+              </a:rPr>
+              <a:t>NEXT LESSON</a:t>
+            </a:r>
+            <a:endParaRPr lang="en-US" sz="1400" dirty="0"/>
+          </a:p>
+        </p:txBody>
+      </p:sp>
+      <p:pic>
+        <p:nvPicPr>
+          <p:cNvPr id="3" name="Image 0" descr="/home/claude/f4/img/minesec_sheet.png">    </p:cNvPr>
+          <p:cNvPicPr>
+            <a:picLocks noChangeAspect="1"/>
+          </p:cNvPicPr>
+          <p:nvPr/>
+        </p:nvPicPr>
+        <p:blipFill>
+          <a:blip r:embed="rId1"/>
+          <a:stretch>
+            <a:fillRect/>
+          </a:stretch>
+        </p:blipFill>
+        <p:spPr>
+          <a:xfrm>
+            <a:off x="0" y="658368"/>
+            <a:ext cx="5120640" cy="5833872"/>
+          </a:xfrm>
+          <a:prstGeom prst="rect">
+            <a:avLst/>
+          </a:prstGeom>
+        </p:spPr>
+      </p:pic>
+      <p:sp>
+        <p:nvSpPr>
+          <p:cNvPr id="4" name="Text 1"/>
+          <p:cNvSpPr/>
+          <p:nvPr/>
+        </p:nvSpPr>
+        <p:spPr>
+          <a:xfrm>
+            <a:off x="5349240" y="1005840"/>
+            <a:ext cx="6522415" cy="731520"/>
+          </a:xfrm>
+          <a:prstGeom prst="rect">
+            <a:avLst/>
+          </a:prstGeom>
+          <a:noFill/>
+          <a:ln/>
+        </p:spPr>
+        <p:txBody>
+          <a:bodyPr wrap="square" lIns="0" tIns="0" rIns="0" bIns="0" rtlCol="0" anchor="ctr">
+            <a:normAutofit/>
+          </a:bodyPr>
+          <a:lstStyle/>
+          <a:p>
+            <a:pPr algn="ctr" indent="0" marL="0">
+              <a:buNone/>
+            </a:pPr>
+            <a:r>
+              <a:rPr lang="en-US" sz="3600" b="1" dirty="0">
+                <a:solidFill>
+                  <a:srgbClr val="990011"/>
+                </a:solidFill>
+                <a:latin typeface="Times New Roman" pitchFamily="34" charset="0"/>
+                <a:ea typeface="Times New Roman" pitchFamily="34" charset="-122"/>
+                <a:cs typeface="Times New Roman" pitchFamily="34" charset="-120"/>
+              </a:rPr>
+              <a:t>Next Lesson</a:t>
+            </a:r>
+            <a:endParaRPr lang="en-US" sz="3600" dirty="0"/>
+          </a:p>
+        </p:txBody>
+      </p:sp>
+      <p:sp>
+        <p:nvSpPr>
+          <p:cNvPr id="5" name="Text 2"/>
+          <p:cNvSpPr/>
+          <p:nvPr/>
+        </p:nvSpPr>
+        <p:spPr>
+          <a:xfrm>
+            <a:off x="5349240" y="1783080"/>
+            <a:ext cx="6522415" cy="4663440"/>
+          </a:xfrm>
+          <a:prstGeom prst="rect">
+            <a:avLst/>
+          </a:prstGeom>
+          <a:noFill/>
+          <a:ln/>
+        </p:spPr>
+        <p:txBody>
+          <a:bodyPr wrap="square" lIns="0" tIns="0" rIns="0" bIns="0" rtlCol="0" anchor="ctr"/>
+          <a:lstStyle/>
+          <a:p>
+            <a:pPr algn="ctr" indent="0" marL="0">
+              <a:spcAft>
+                <a:spcPts val="800"/>
+              </a:spcAft>
+              <a:buNone/>
+            </a:pPr>
+            <a:r>
+              <a:rPr lang="en-US" sz="4000" b="1" dirty="0">
+                <a:solidFill>
+                  <a:srgbClr val="111111"/>
+                </a:solidFill>
+                <a:latin typeface="Times New Roman" pitchFamily="34" charset="0"/>
+                <a:ea typeface="Times New Roman" pitchFamily="34" charset="-122"/>
+                <a:cs typeface="Times New Roman" pitchFamily="34" charset="-120"/>
+              </a:rPr>
+              <a:t>Our next lesson will be on:</a:t>
+            </a:r>
+            <a:endParaRPr lang="en-US" sz="4000" dirty="0"/>
+          </a:p>
+          <a:p>
+            <a:pPr algn="ctr" indent="0" marL="0">
+              <a:spcAft>
+                <a:spcPts val="800"/>
+              </a:spcAft>
+              <a:buNone/>
+            </a:pPr>
+            <a:r>
+              <a:rPr lang="en-US" sz="4000" b="1" dirty="0">
+                <a:solidFill>
+                  <a:srgbClr val="990011"/>
+                </a:solidFill>
+                <a:latin typeface="Times New Roman" pitchFamily="34" charset="0"/>
+                <a:ea typeface="Times New Roman" pitchFamily="34" charset="-122"/>
+                <a:cs typeface="Times New Roman" pitchFamily="34" charset="-120"/>
+              </a:rPr>
+              <a:t>Lesson 9: Development of Rail Transport</a:t>
+            </a:r>
+            <a:endParaRPr lang="en-US" sz="4000" dirty="0"/>
+          </a:p>
+        </p:txBody>
+      </p:sp>
+      <p:sp>
+        <p:nvSpPr>
+          <p:cNvPr id="25" name="Slide Number Placeholder 0"/>
+          <p:cNvSpPr>
+            <a:spLocks noGrp="1"/>
+          </p:cNvSpPr>
+          <p:nvPr>
+            <p:ph type="sldNum" sz="quarter" idx="4294967295"/>
+          </p:nvPr>
+        </p:nvSpPr>
+        <p:spPr>
+          <a:xfrm>
+            <a:off x="27432" y="91440"/>
+            <a:ext cx="585216" cy="475488"/>
+          </a:xfrm>
+          <a:prstGeom prst="rect">
+            <a:avLst/>
+          </a:prstGeom>
+          <a:extLst>
+            <a:ext uri="{C572A759-6A51-4108-AA02-DFA0A04FC94B}">
+              <ma14:wrappingTextBoxFlag xmlns:ma14="http://schemas.microsoft.com/office/mac/drawingml/2011/main" val="0"/>
+            </a:ext>
+          </a:extLst>
+        </p:spPr>
+        <p:txBody>
+          <a:bodyPr/>
+          <a:lstStyle>
+            <a:lvl1pPr>
+              <a:defRPr sz="2000">
+                <a:solidFill>
+                  <a:srgbClr val="FFFFFF"/>
+                </a:solidFill>
+                <a:latin typeface="Calibri"/>
+                <a:ea typeface="Calibri"/>
+                <a:cs typeface="Calibri"/>
+              </a:defRPr>
+            </a:lvl1pPr>
+          </a:lstStyle>
+          <a:p>
+            <a:pPr algn="ctr"/>
+            <a:fld id="{F7021451-1387-4CA6-816F-3879F97B5CBC}" type="slidenum">
+              <a:rPr b="1" lang="en-US"/>
+              <a:t>50</a:t>
+            </a:fld>
+            <a:endParaRPr lang="en-US"/>
+          </a:p>
+        </p:txBody>
+      </p:sp>
+    </p:spTree>
+  </p:cSld>
+  <p:clrMapOvr>
+    <a:masterClrMapping/>
+  </p:clrMapOvr>
+</p:sld>
+</file>
+
+<file path=ppt/slides/slide51.xml><?xml version="1.0" encoding="utf-8"?>
+<p:sld xmlns:a="http://schemas.openxmlformats.org/drawingml/2006/main" xmlns:r="http://schemas.openxmlformats.org/officeDocument/2006/relationships" xmlns:p="http://schemas.openxmlformats.org/presentationml/2006/main">
+  <p:cSld name="Slide 51">
+    <p:spTree>
+      <p:nvGrpSpPr>
+        <p:cNvPr id="1" name=""/>
+        <p:cNvGrpSpPr/>
+        <p:nvPr/>
+      </p:nvGrpSpPr>
+      <p:grpSpPr>
+        <a:xfrm>
+          <a:off x="0" y="0"/>
+          <a:ext cx="0" cy="0"/>
+          <a:chOff x="0" y="0"/>
+          <a:chExt cx="0" cy="0"/>
+        </a:xfrm>
+      </p:grpSpPr>
+      <p:sp>
+        <p:nvSpPr>
+          <p:cNvPr id="2" name="Text 0"/>
+          <p:cNvSpPr/>
+          <p:nvPr/>
+        </p:nvSpPr>
+        <p:spPr>
+          <a:xfrm>
+            <a:off x="457200" y="713232"/>
+            <a:ext cx="11368735" cy="274320"/>
+          </a:xfrm>
+          <a:prstGeom prst="rect">
+            <a:avLst/>
+          </a:prstGeom>
+          <a:noFill/>
+          <a:ln/>
+        </p:spPr>
+        <p:txBody>
+          <a:bodyPr wrap="square" lIns="0" tIns="0" rIns="0" bIns="0" rtlCol="0" anchor="ctr"/>
+          <a:lstStyle/>
+          <a:p>
+            <a:pPr algn="r" indent="0" marL="0">
+              <a:buNone/>
+            </a:pPr>
+            <a:r>
+              <a:rPr lang="en-US" sz="1400" b="1" dirty="0">
+                <a:solidFill>
+                  <a:srgbClr val="1C3F6E"/>
+                </a:solidFill>
+                <a:latin typeface="Calibri" pitchFamily="34" charset="0"/>
+                <a:ea typeface="Calibri" pitchFamily="34" charset="-122"/>
+                <a:cs typeface="Calibri" pitchFamily="34" charset="-120"/>
+              </a:rPr>
               <a:t>BILINGUAL GAME</a:t>
             </a:r>
             <a:endParaRPr lang="en-US" sz="1400" dirty="0"/>
@@ -17287,7 +18406,7 @@
       </p:sp>
       <p:graphicFrame>
         <p:nvGraphicFramePr>
-          <p:cNvPr id="50" name="Table 0"/>
+          <p:cNvPr id="52" name="Table 0"/>
           <p:cNvGraphicFramePr>
             <a:graphicFrameLocks noGrp="1"/>
           </p:cNvGraphicFramePr>
@@ -18323,7 +19442,7 @@
             <a:pPr algn="ctr"/>
             <a:fld id="{F7021451-1387-4CA6-816F-3879F97B5CBC}" type="slidenum">
               <a:rPr b="1" lang="en-US"/>
-              <a:t>49</a:t>
+              <a:t>51</a:t>
             </a:fld>
             <a:endParaRPr lang="en-US"/>
           </a:p>
@@ -18337,9 +19456,9 @@
 </p:sld>
 </file>
 
-<file path=ppt/slides/slide5.xml><?xml version="1.0" encoding="utf-8"?>
+<file path=ppt/slides/slide52.xml><?xml version="1.0" encoding="utf-8"?>
 <p:sld xmlns:a="http://schemas.openxmlformats.org/drawingml/2006/main" xmlns:r="http://schemas.openxmlformats.org/officeDocument/2006/relationships" xmlns:p="http://schemas.openxmlformats.org/presentationml/2006/main">
-  <p:cSld name="Slide 5">
+  <p:cSld name="Slide 52">
     <p:spTree>
       <p:nvGrpSpPr>
         <p:cNvPr id="1" name=""/>
@@ -18387,225 +19506,6 @@
                 <a:ea typeface="Calibri" pitchFamily="34" charset="-122"/>
                 <a:cs typeface="Calibri" pitchFamily="34" charset="-120"/>
               </a:rPr>
-              <a:t>HOMEWORK CORRECTION</a:t>
-            </a:r>
-            <a:endParaRPr lang="en-US" sz="1400" dirty="0"/>
-          </a:p>
-        </p:txBody>
-      </p:sp>
-      <p:pic>
-        <p:nvPicPr>
-          <p:cNvPr id="3" name="Image 0" descr="/home/claude/f4/img/minesec_sheet.png">    </p:cNvPr>
-          <p:cNvPicPr>
-            <a:picLocks noChangeAspect="1"/>
-          </p:cNvPicPr>
-          <p:nvPr/>
-        </p:nvPicPr>
-        <p:blipFill>
-          <a:blip r:embed="rId1"/>
-          <a:stretch>
-            <a:fillRect/>
-          </a:stretch>
-        </p:blipFill>
-        <p:spPr>
-          <a:xfrm>
-            <a:off x="0" y="658368"/>
-            <a:ext cx="5120640" cy="5833872"/>
-          </a:xfrm>
-          <a:prstGeom prst="rect">
-            <a:avLst/>
-          </a:prstGeom>
-        </p:spPr>
-      </p:pic>
-      <p:sp>
-        <p:nvSpPr>
-          <p:cNvPr id="4" name="Text 1"/>
-          <p:cNvSpPr/>
-          <p:nvPr/>
-        </p:nvSpPr>
-        <p:spPr>
-          <a:xfrm>
-            <a:off x="5349240" y="1005840"/>
-            <a:ext cx="6522415" cy="731520"/>
-          </a:xfrm>
-          <a:prstGeom prst="rect">
-            <a:avLst/>
-          </a:prstGeom>
-          <a:noFill/>
-          <a:ln/>
-        </p:spPr>
-        <p:txBody>
-          <a:bodyPr wrap="square" lIns="0" tIns="0" rIns="0" bIns="0" rtlCol="0" anchor="ctr">
-            <a:normAutofit/>
-          </a:bodyPr>
-          <a:lstStyle/>
-          <a:p>
-            <a:pPr algn="ctr" indent="0" marL="0">
-              <a:buNone/>
-            </a:pPr>
-            <a:r>
-              <a:rPr lang="en-US" sz="3600" b="1" dirty="0">
-                <a:solidFill>
-                  <a:srgbClr val="990011"/>
-                </a:solidFill>
-                <a:latin typeface="Times New Roman" pitchFamily="34" charset="0"/>
-                <a:ea typeface="Times New Roman" pitchFamily="34" charset="-122"/>
-                <a:cs typeface="Times New Roman" pitchFamily="34" charset="-120"/>
-              </a:rPr>
-              <a:t>Correction: Possible Answer</a:t>
-            </a:r>
-            <a:endParaRPr lang="en-US" sz="3600" dirty="0"/>
-          </a:p>
-        </p:txBody>
-      </p:sp>
-      <p:sp>
-        <p:nvSpPr>
-          <p:cNvPr id="5" name="Text 2"/>
-          <p:cNvSpPr/>
-          <p:nvPr/>
-        </p:nvSpPr>
-        <p:spPr>
-          <a:xfrm>
-            <a:off x="5349240" y="1783080"/>
-            <a:ext cx="6522415" cy="4663440"/>
-          </a:xfrm>
-          <a:prstGeom prst="rect">
-            <a:avLst/>
-          </a:prstGeom>
-          <a:noFill/>
-          <a:ln/>
-        </p:spPr>
-        <p:txBody>
-          <a:bodyPr wrap="square" lIns="0" tIns="0" rIns="0" bIns="0" rtlCol="0" anchor="t"/>
-          <a:lstStyle/>
-          <a:p>
-            <a:pPr algn="l" indent="0" marL="0">
-              <a:spcAft>
-                <a:spcPts val="800"/>
-              </a:spcAft>
-              <a:buNone/>
-            </a:pPr>
-            <a:r>
-              <a:rPr lang="en-US" sz="4000" dirty="0">
-                <a:solidFill>
-                  <a:srgbClr val="111111"/>
-                </a:solidFill>
-                <a:latin typeface="Times New Roman" pitchFamily="34" charset="0"/>
-                <a:ea typeface="Times New Roman" pitchFamily="34" charset="-122"/>
-                <a:cs typeface="Times New Roman" pitchFamily="34" charset="-120"/>
-              </a:rPr>
-              <a:t>Transport: foot, bicycle, motorbike, taxi, bus; telecommunication: mobile phone, radio, television, internet.</a:t>
-            </a:r>
-            <a:endParaRPr lang="en-US" sz="4000" dirty="0"/>
-          </a:p>
-        </p:txBody>
-      </p:sp>
-      <p:sp>
-        <p:nvSpPr>
-          <p:cNvPr id="25" name="Slide Number Placeholder 0"/>
-          <p:cNvSpPr>
-            <a:spLocks noGrp="1"/>
-          </p:cNvSpPr>
-          <p:nvPr>
-            <p:ph type="sldNum" sz="quarter" idx="4294967295"/>
-          </p:nvPr>
-        </p:nvSpPr>
-        <p:spPr>
-          <a:xfrm>
-            <a:off x="27432" y="91440"/>
-            <a:ext cx="585216" cy="475488"/>
-          </a:xfrm>
-          <a:prstGeom prst="rect">
-            <a:avLst/>
-          </a:prstGeom>
-          <a:extLst>
-            <a:ext uri="{C572A759-6A51-4108-AA02-DFA0A04FC94B}">
-              <ma14:wrappingTextBoxFlag xmlns:ma14="http://schemas.microsoft.com/office/mac/drawingml/2011/main" val="0"/>
-            </a:ext>
-          </a:extLst>
-        </p:spPr>
-        <p:txBody>
-          <a:bodyPr/>
-          <a:lstStyle>
-            <a:lvl1pPr>
-              <a:defRPr sz="2000">
-                <a:solidFill>
-                  <a:srgbClr val="FFFFFF"/>
-                </a:solidFill>
-                <a:latin typeface="Calibri"/>
-                <a:ea typeface="Calibri"/>
-                <a:cs typeface="Calibri"/>
-              </a:defRPr>
-            </a:lvl1pPr>
-          </a:lstStyle>
-          <a:p>
-            <a:pPr algn="ctr"/>
-            <a:fld id="{F7021451-1387-4CA6-816F-3879F97B5CBC}" type="slidenum">
-              <a:rPr b="1" lang="en-US"/>
-              <a:t>5</a:t>
-            </a:fld>
-            <a:endParaRPr lang="en-US"/>
-          </a:p>
-        </p:txBody>
-      </p:sp>
-    </p:spTree>
-  </p:cSld>
-  <p:clrMapOvr>
-    <a:masterClrMapping/>
-  </p:clrMapOvr>
-</p:sld>
-</file>
-
-<file path=ppt/slides/slide50.xml><?xml version="1.0" encoding="utf-8"?>
-<p:sld xmlns:a="http://schemas.openxmlformats.org/drawingml/2006/main" xmlns:r="http://schemas.openxmlformats.org/officeDocument/2006/relationships" xmlns:p="http://schemas.openxmlformats.org/presentationml/2006/main">
-  <p:cSld name="Slide 50">
-    <p:spTree>
-      <p:nvGrpSpPr>
-        <p:cNvPr id="1" name=""/>
-        <p:cNvGrpSpPr/>
-        <p:nvPr/>
-      </p:nvGrpSpPr>
-      <p:grpSpPr>
-        <a:xfrm>
-          <a:off x="0" y="0"/>
-          <a:ext cx="0" cy="0"/>
-          <a:chOff x="0" y="0"/>
-          <a:chExt cx="0" cy="0"/>
-        </a:xfrm>
-      </p:grpSpPr>
-      <p:sp>
-        <p:nvSpPr>
-          <p:cNvPr id="2" name="Text 0"/>
-          <p:cNvSpPr/>
-          <p:nvPr/>
-        </p:nvSpPr>
-        <p:spPr>
-          <a:xfrm>
-            <a:off x="457200" y="713232"/>
-            <a:ext cx="11368735" cy="274320"/>
-          </a:xfrm>
-          <a:prstGeom prst="rect">
-            <a:avLst/>
-          </a:prstGeom>
-          <a:noFill/>
-          <a:ln/>
-        </p:spPr>
-        <p:txBody>
-          <a:bodyPr wrap="square" lIns="0" tIns="0" rIns="0" bIns="0" rtlCol="0" anchor="ctr"/>
-          <a:lstStyle/>
-          <a:p>
-            <a:pPr algn="r" indent="0" marL="0">
-              <a:buNone/>
-            </a:pPr>
-            <a:r>
-              <a:rPr lang="en-US" sz="1400" b="1" dirty="0">
-                <a:solidFill>
-                  <a:srgbClr val="1C3F6E"/>
-                </a:solidFill>
-                <a:latin typeface="Calibri" pitchFamily="34" charset="0"/>
-                <a:ea typeface="Calibri" pitchFamily="34" charset="-122"/>
-                <a:cs typeface="Calibri" pitchFamily="34" charset="-120"/>
-              </a:rPr>
               <a:t>LOGBOOK</a:t>
             </a:r>
             <a:endParaRPr lang="en-US" sz="1400" dirty="0"/>
@@ -18653,7 +19553,7 @@
       </p:sp>
       <p:graphicFrame>
         <p:nvGraphicFramePr>
-          <p:cNvPr id="51" name="Table 0"/>
+          <p:cNvPr id="53" name="Table 0"/>
           <p:cNvGraphicFramePr>
             <a:graphicFrameLocks noGrp="1"/>
           </p:cNvGraphicFramePr>
@@ -19275,7 +20175,7 @@
             <a:pPr algn="ctr"/>
             <a:fld id="{F7021451-1387-4CA6-816F-3879F97B5CBC}" type="slidenum">
               <a:rPr b="1" lang="en-US"/>
-              <a:t>50</a:t>
+              <a:t>52</a:t>
             </a:fld>
             <a:endParaRPr lang="en-US"/>
           </a:p>
@@ -19289,9 +20189,9 @@
 </p:sld>
 </file>
 
-<file path=ppt/slides/slide51.xml><?xml version="1.0" encoding="utf-8"?>
+<file path=ppt/slides/slide53.xml><?xml version="1.0" encoding="utf-8"?>
 <p:sld xmlns:a="http://schemas.openxmlformats.org/drawingml/2006/main" xmlns:r="http://schemas.openxmlformats.org/officeDocument/2006/relationships" xmlns:p="http://schemas.openxmlformats.org/presentationml/2006/main">
-  <p:cSld name="Slide 51">
+  <p:cSld name="Slide 53">
     <p:spTree>
       <p:nvGrpSpPr>
         <p:cNvPr id="1" name=""/>
@@ -19386,7 +20286,7 @@
       </p:sp>
       <p:graphicFrame>
         <p:nvGraphicFramePr>
-          <p:cNvPr id="52" name="Table 0"/>
+          <p:cNvPr id="54" name="Table 0"/>
           <p:cNvGraphicFramePr>
             <a:graphicFrameLocks noGrp="1"/>
           </p:cNvGraphicFramePr>
@@ -19496,7 +20396,7 @@
                           <a:ea typeface="Calibri" pitchFamily="34" charset="-122"/>
                           <a:cs typeface="Calibri" pitchFamily="34" charset="-120"/>
                         </a:rPr>
-                        <a:t>Varieties of Roads; Conditions for the Development of Road Transport; Advantages and Disadvantages.</a:t>
+                        <a:t>Varieties of Roads; Conditions for the Development of Road Transport; Advantages; Disadvantages.</a:t>
                       </a:r>
                       <a:endParaRPr lang="en-US" sz="1600" dirty="0">
                         <a:latin typeface="Calibri" charset="0"/>
@@ -20146,7 +21046,7 @@
             <a:pPr algn="ctr"/>
             <a:fld id="{F7021451-1387-4CA6-816F-3879F97B5CBC}" type="slidenum">
               <a:rPr b="1" lang="en-US"/>
-              <a:t>51</a:t>
+              <a:t>53</a:t>
             </a:fld>
             <a:endParaRPr lang="en-US"/>
           </a:p>
@@ -20160,9 +21060,9 @@
 </p:sld>
 </file>
 
-<file path=ppt/slides/slide52.xml><?xml version="1.0" encoding="utf-8"?>
+<file path=ppt/slides/slide54.xml><?xml version="1.0" encoding="utf-8"?>
 <p:sld xmlns:a="http://schemas.openxmlformats.org/drawingml/2006/main" xmlns:r="http://schemas.openxmlformats.org/officeDocument/2006/relationships" xmlns:p="http://schemas.openxmlformats.org/presentationml/2006/main">
-  <p:cSld name="Slide 52">
+  <p:cSld name="Slide 54">
     <p:spTree>
       <p:nvGrpSpPr>
         <p:cNvPr id="1" name=""/>
@@ -20471,7 +21371,7 @@
             <a:pPr algn="ctr"/>
             <a:fld id="{F7021451-1387-4CA6-816F-3879F97B5CBC}" type="slidenum">
               <a:rPr b="1" lang="en-US"/>
-              <a:t>52</a:t>
+              <a:t>54</a:t>
             </a:fld>
             <a:endParaRPr lang="en-US"/>
           </a:p>
@@ -20485,9 +21385,9 @@
 </p:sld>
 </file>
 
-<file path=ppt/slides/slide53.xml><?xml version="1.0" encoding="utf-8"?>
+<file path=ppt/slides/slide55.xml><?xml version="1.0" encoding="utf-8"?>
 <p:sld xmlns:a="http://schemas.openxmlformats.org/drawingml/2006/main" xmlns:r="http://schemas.openxmlformats.org/officeDocument/2006/relationships" xmlns:p="http://schemas.openxmlformats.org/presentationml/2006/main">
-  <p:cSld name="Slide 53">
+  <p:cSld name="Slide 55">
     <p:spTree>
       <p:nvGrpSpPr>
         <p:cNvPr id="1" name=""/>
@@ -20796,7 +21696,7 @@
             <a:pPr algn="ctr"/>
             <a:fld id="{F7021451-1387-4CA6-816F-3879F97B5CBC}" type="slidenum">
               <a:rPr b="1" lang="en-US"/>
-              <a:t>53</a:t>
+              <a:t>55</a:t>
             </a:fld>
             <a:endParaRPr lang="en-US"/>
           </a:p>
